--- a/output/presentation/activepieces-license-review.pptx
+++ b/output/presentation/activepieces-license-review.pptx
@@ -2,22 +2,22 @@
 <file path=ppt/presentation.xml><?xml version="1.0" encoding="utf-8"?>
 <p:presentation xmlns:p="http://schemas.openxmlformats.org/presentationml/2006/main">
   <p:sldMasterIdLst>
-    <p:sldMasterId xmlns:r="http://schemas.openxmlformats.org/officeDocument/2006/relationships" id="2147483648" r:id="Rf6e86ed92026408e"/>
+    <p:sldMasterId xmlns:r="http://schemas.openxmlformats.org/officeDocument/2006/relationships" id="2147483648" r:id="R4e9f1c0d55494968"/>
   </p:sldMasterIdLst>
   <p:notesMasterIdLst>
-    <p:notesMasterId xmlns:r="http://schemas.openxmlformats.org/officeDocument/2006/relationships" r:id="Rd51e8fa80cf94478"/>
+    <p:notesMasterId xmlns:r="http://schemas.openxmlformats.org/officeDocument/2006/relationships" r:id="R3b026d5f22f54d3c"/>
   </p:notesMasterIdLst>
   <p:sldIdLst>
-    <p:sldId xmlns:r="http://schemas.openxmlformats.org/officeDocument/2006/relationships" id="256" r:id="Rd5af296d0df44f76"/>
-    <p:sldId xmlns:r="http://schemas.openxmlformats.org/officeDocument/2006/relationships" id="257" r:id="Re1357c5042624eb6"/>
-    <p:sldId xmlns:r="http://schemas.openxmlformats.org/officeDocument/2006/relationships" id="258" r:id="R409a1539729643c4"/>
-    <p:sldId xmlns:r="http://schemas.openxmlformats.org/officeDocument/2006/relationships" id="259" r:id="R2592bb919025494e"/>
-    <p:sldId xmlns:r="http://schemas.openxmlformats.org/officeDocument/2006/relationships" id="260" r:id="R1d647c7a5073478f"/>
-    <p:sldId xmlns:r="http://schemas.openxmlformats.org/officeDocument/2006/relationships" id="261" r:id="Rb798932c1d464182"/>
-    <p:sldId xmlns:r="http://schemas.openxmlformats.org/officeDocument/2006/relationships" id="262" r:id="R248ee60ee6b34278"/>
-    <p:sldId xmlns:r="http://schemas.openxmlformats.org/officeDocument/2006/relationships" id="263" r:id="Rf93a7b6f47d440a5"/>
-    <p:sldId xmlns:r="http://schemas.openxmlformats.org/officeDocument/2006/relationships" id="264" r:id="Re84fb56cc35a4dc3"/>
-    <p:sldId xmlns:r="http://schemas.openxmlformats.org/officeDocument/2006/relationships" id="265" r:id="Rd07b57e7606c4867"/>
+    <p:sldId xmlns:r="http://schemas.openxmlformats.org/officeDocument/2006/relationships" id="256" r:id="R7f47598b26cc40fc"/>
+    <p:sldId xmlns:r="http://schemas.openxmlformats.org/officeDocument/2006/relationships" id="257" r:id="Ra56a720f18b540d5"/>
+    <p:sldId xmlns:r="http://schemas.openxmlformats.org/officeDocument/2006/relationships" id="258" r:id="Rd619cd9e284a4769"/>
+    <p:sldId xmlns:r="http://schemas.openxmlformats.org/officeDocument/2006/relationships" id="259" r:id="Rd73d6c66da2941a0"/>
+    <p:sldId xmlns:r="http://schemas.openxmlformats.org/officeDocument/2006/relationships" id="260" r:id="Rc14584cf455046b2"/>
+    <p:sldId xmlns:r="http://schemas.openxmlformats.org/officeDocument/2006/relationships" id="261" r:id="R3dd2fb43dfb243bb"/>
+    <p:sldId xmlns:r="http://schemas.openxmlformats.org/officeDocument/2006/relationships" id="262" r:id="R72b465ea563a4c28"/>
+    <p:sldId xmlns:r="http://schemas.openxmlformats.org/officeDocument/2006/relationships" id="263" r:id="R607155aa5cc543b8"/>
+    <p:sldId xmlns:r="http://schemas.openxmlformats.org/officeDocument/2006/relationships" id="264" r:id="Rfdb570555e454287"/>
+    <p:sldId xmlns:r="http://schemas.openxmlformats.org/officeDocument/2006/relationships" id="265" r:id="Rdb5f4175d13d4853"/>
   </p:sldIdLst>
   <p:sldSz cx="12192000" cy="6858000"/>
   <p:notesSz cx="6858000" cy="9144000"/>
@@ -1364,7 +1364,7 @@
   </p:cSld>
   <p:clrMap bg1="lt1" tx1="dk1" bg2="lt2" tx2="dk2" accent1="accent1" accent2="accent2" accent3="accent3" accent4="accent4" accent5="accent5" accent6="accent6" hlink="hlink" folHlink="folHlink"/>
   <p:sldLayoutIdLst>
-    <p:sldLayoutId xmlns:r="http://schemas.openxmlformats.org/officeDocument/2006/relationships" id="2147483649" r:id="R08351ac20df444c6"/>
+    <p:sldLayoutId xmlns:r="http://schemas.openxmlformats.org/officeDocument/2006/relationships" id="2147483649" r:id="Rc48ed9753c0a4849"/>
   </p:sldLayoutIdLst>
   <p:txStyles>
     <p:titleStyle>
@@ -1908,7 +1908,7 @@
           <p:cNvPr id="6" name="">
             <a:extLst xmlns:a="http://schemas.openxmlformats.org/drawingml/2006/main">
               <a:ext uri="{FF2B5EF4-FFF2-40B4-BE49-F238E27FC236}">
-                <a16:creationId xmlns:a16="http://schemas.microsoft.com/office/drawing/2014/main" id="{1B2FFEC9-F058-43DB-BA22-D733C4F9C006}"/>
+                <a16:creationId xmlns:a16="http://schemas.microsoft.com/office/drawing/2014/main" id="{63EEE9FD-B18E-4ED0-B668-360621E5D967}"/>
               </a:ext>
             </a:extLst>
           </p:cNvPr>
@@ -1953,7 +1953,7 @@
           <p:cNvPr id="2" name="">
             <a:extLst xmlns:a="http://schemas.openxmlformats.org/drawingml/2006/main">
               <a:ext uri="{FF2B5EF4-FFF2-40B4-BE49-F238E27FC236}">
-                <a16:creationId xmlns:a16="http://schemas.microsoft.com/office/drawing/2014/main" id="{E9AD5956-1476-4FE0-A304-AC97E8A67FB8}"/>
+                <a16:creationId xmlns:a16="http://schemas.microsoft.com/office/drawing/2014/main" id="{38E944CD-7DA2-491C-A6BF-B83C8FF9F2B3}"/>
               </a:ext>
             </a:extLst>
           </p:cNvPr>
@@ -1999,7 +1999,7 @@
           <p:cNvPr id="3" name="">
             <a:extLst xmlns:a="http://schemas.openxmlformats.org/drawingml/2006/main">
               <a:ext uri="{FF2B5EF4-FFF2-40B4-BE49-F238E27FC236}">
-                <a16:creationId xmlns:a16="http://schemas.microsoft.com/office/drawing/2014/main" id="{E1A0E10C-8450-4C82-B0DA-03613E0A85DC}"/>
+                <a16:creationId xmlns:a16="http://schemas.microsoft.com/office/drawing/2014/main" id="{9E6BFD25-2D6B-457D-B7B8-680BFD6C3305}"/>
               </a:ext>
             </a:extLst>
           </p:cNvPr>
@@ -2034,7 +2034,7 @@
               </a:defRPr>
             </a:pPr>
             <a:r>
-              <a:t>사내 Assist 실증부터 고객 제품화까지의 사용 범위와 계약 게이트</a:t>
+              <a:t>Community 실행 기반과 상위 기능 자체 구현 원칙</a:t>
             </a:r>
           </a:p>
         </p:txBody>
@@ -2044,7 +2044,7 @@
           <p:cNvPr id="4" name="">
             <a:extLst xmlns:a="http://schemas.openxmlformats.org/drawingml/2006/main">
               <a:ext uri="{FF2B5EF4-FFF2-40B4-BE49-F238E27FC236}">
-                <a16:creationId xmlns:a16="http://schemas.microsoft.com/office/drawing/2014/main" id="{801043B6-2EB0-4640-B375-D9ABDAEF8C22}"/>
+                <a16:creationId xmlns:a16="http://schemas.microsoft.com/office/drawing/2014/main" id="{F78C5CC3-4548-4957-A10A-8A1E025FC448}"/>
               </a:ext>
             </a:extLst>
           </p:cNvPr>
@@ -2071,7 +2071,7 @@
           <p:cNvPr id="5" name="">
             <a:extLst xmlns:a="http://schemas.openxmlformats.org/drawingml/2006/main">
               <a:ext uri="{FF2B5EF4-FFF2-40B4-BE49-F238E27FC236}">
-                <a16:creationId xmlns:a16="http://schemas.microsoft.com/office/drawing/2014/main" id="{07A6CD64-4FF7-4241-A95A-BECA70A93BBA}"/>
+                <a16:creationId xmlns:a16="http://schemas.microsoft.com/office/drawing/2014/main" id="{126CBF99-3C39-44A2-9B41-95CE9174C83D}"/>
               </a:ext>
             </a:extLst>
           </p:cNvPr>
@@ -2114,7 +2114,7 @@
     </p:spTree>
     <p:extLst>
       <p:ext uri="{BB962C8B-B14F-4D97-AF65-F5344CB8AC3E}">
-        <p14:creationId xmlns:p14="http://schemas.microsoft.com/office/powerpoint/2010/main" val="1379122225"/>
+        <p14:creationId xmlns:p14="http://schemas.microsoft.com/office/powerpoint/2010/main" val="654307692"/>
       </p:ext>
     </p:extLst>
   </p:cSld>
@@ -2138,7 +2138,7 @@
           <p:cNvPr id="9" name="">
             <a:extLst xmlns:a="http://schemas.openxmlformats.org/drawingml/2006/main">
               <a:ext uri="{FF2B5EF4-FFF2-40B4-BE49-F238E27FC236}">
-                <a16:creationId xmlns:a16="http://schemas.microsoft.com/office/drawing/2014/main" id="{96F09A08-EF8B-460D-A6E7-47765525D6DD}"/>
+                <a16:creationId xmlns:a16="http://schemas.microsoft.com/office/drawing/2014/main" id="{43A2A986-4257-4BD0-9F33-8D5ACFFDB9B6}"/>
               </a:ext>
             </a:extLst>
           </p:cNvPr>
@@ -2183,7 +2183,7 @@
           <p:cNvPr id="2" name="">
             <a:extLst xmlns:a="http://schemas.openxmlformats.org/drawingml/2006/main">
               <a:ext uri="{FF2B5EF4-FFF2-40B4-BE49-F238E27FC236}">
-                <a16:creationId xmlns:a16="http://schemas.microsoft.com/office/drawing/2014/main" id="{9D705E06-71A6-4E80-A00A-5DC31A29FD7B}"/>
+                <a16:creationId xmlns:a16="http://schemas.microsoft.com/office/drawing/2014/main" id="{B5163DBB-8F7E-4C46-B6B7-25A5D5F98C7F}"/>
               </a:ext>
             </a:extLst>
           </p:cNvPr>
@@ -2218,8 +2218,8 @@
               </a:defRPr>
             </a:pPr>
             <a:r>
-              <a:t>Community로 검증하고,
-제품 권한은 TechFlow에 남긴다.</a:t>
+              <a:t>Community를 기반으로 구현하고,
+필요한 상위 기능은 TechFlow에서 만든다.</a:t>
             </a:r>
           </a:p>
         </p:txBody>
@@ -2229,7 +2229,7 @@
           <p:cNvPr id="3" name="">
             <a:extLst xmlns:a="http://schemas.openxmlformats.org/drawingml/2006/main">
               <a:ext uri="{FF2B5EF4-FFF2-40B4-BE49-F238E27FC236}">
-                <a16:creationId xmlns:a16="http://schemas.microsoft.com/office/drawing/2014/main" id="{D91941DD-4E58-4A24-A0A6-13D5424EA2B5}"/>
+                <a16:creationId xmlns:a16="http://schemas.microsoft.com/office/drawing/2014/main" id="{2976C677-4100-47D9-8FC8-D33A43D40637}"/>
               </a:ext>
             </a:extLst>
           </p:cNvPr>
@@ -2258,7 +2258,7 @@
           <p:cNvPr id="4" name="">
             <a:extLst xmlns:a="http://schemas.openxmlformats.org/drawingml/2006/main">
               <a:ext uri="{FF2B5EF4-FFF2-40B4-BE49-F238E27FC236}">
-                <a16:creationId xmlns:a16="http://schemas.microsoft.com/office/drawing/2014/main" id="{995A5696-19AF-4BF4-8CAB-C48A22A5D9A1}"/>
+                <a16:creationId xmlns:a16="http://schemas.microsoft.com/office/drawing/2014/main" id="{EDBBE370-8BD6-41D5-B1AB-6ED4E8E69EEC}"/>
               </a:ext>
             </a:extLst>
           </p:cNvPr>
@@ -2303,7 +2303,7 @@
           <p:cNvPr id="5" name="">
             <a:extLst xmlns:a="http://schemas.openxmlformats.org/drawingml/2006/main">
               <a:ext uri="{FF2B5EF4-FFF2-40B4-BE49-F238E27FC236}">
-                <a16:creationId xmlns:a16="http://schemas.microsoft.com/office/drawing/2014/main" id="{23635328-955D-427E-B068-63A786D62FED}"/>
+                <a16:creationId xmlns:a16="http://schemas.microsoft.com/office/drawing/2014/main" id="{DFA9894D-13FA-447B-9FDD-23632E1D69AA}"/>
               </a:ext>
             </a:extLst>
           </p:cNvPr>
@@ -2338,7 +2338,7 @@
               </a:defRPr>
             </a:pPr>
             <a:r>
-              <a:t>사내 Assist PoC 착수 · 고객 배포 전 서면 확인 · 직접 UI/Embedding은 계약 후 진행</a:t>
+              <a:t>자체 구현 범위 제한 없음 · 고객 공개·판매·배포 결정은 제품 책임자에게 분리</a:t>
             </a:r>
           </a:p>
         </p:txBody>
@@ -2348,7 +2348,7 @@
           <p:cNvPr id="6" name="">
             <a:extLst xmlns:a="http://schemas.openxmlformats.org/drawingml/2006/main">
               <a:ext uri="{FF2B5EF4-FFF2-40B4-BE49-F238E27FC236}">
-                <a16:creationId xmlns:a16="http://schemas.microsoft.com/office/drawing/2014/main" id="{322F9C13-3D88-4AC1-B074-73CE985DB812}"/>
+                <a16:creationId xmlns:a16="http://schemas.microsoft.com/office/drawing/2014/main" id="{ACF000B4-AE2D-4E6C-93AC-F998C28814DC}"/>
               </a:ext>
             </a:extLst>
           </p:cNvPr>
@@ -2375,7 +2375,7 @@
           <p:cNvPr id="7" name="">
             <a:extLst xmlns:a="http://schemas.openxmlformats.org/drawingml/2006/main">
               <a:ext uri="{FF2B5EF4-FFF2-40B4-BE49-F238E27FC236}">
-                <a16:creationId xmlns:a16="http://schemas.microsoft.com/office/drawing/2014/main" id="{9C2A20C6-D64B-4372-A23F-3FA5D865B976}"/>
+                <a16:creationId xmlns:a16="http://schemas.microsoft.com/office/drawing/2014/main" id="{81011F15-05A5-4CFC-B018-A813A365C836}"/>
               </a:ext>
             </a:extLst>
           </p:cNvPr>
@@ -2420,7 +2420,7 @@
           <p:cNvPr id="8" name="">
             <a:extLst xmlns:a="http://schemas.openxmlformats.org/drawingml/2006/main">
               <a:ext uri="{FF2B5EF4-FFF2-40B4-BE49-F238E27FC236}">
-                <a16:creationId xmlns:a16="http://schemas.microsoft.com/office/drawing/2014/main" id="{8A3D7CE2-3FF4-41B5-91F9-1DDF1D29F557}"/>
+                <a16:creationId xmlns:a16="http://schemas.microsoft.com/office/drawing/2014/main" id="{8EC2E9F4-EEC3-4CD4-A1FE-A2B3BF3EBB52}"/>
               </a:ext>
             </a:extLst>
           </p:cNvPr>
@@ -2463,7 +2463,7 @@
     </p:spTree>
     <p:extLst>
       <p:ext uri="{BB962C8B-B14F-4D97-AF65-F5344CB8AC3E}">
-        <p14:creationId xmlns:p14="http://schemas.microsoft.com/office/powerpoint/2010/main" val="1213734361"/>
+        <p14:creationId xmlns:p14="http://schemas.microsoft.com/office/powerpoint/2010/main" val="1763466800"/>
       </p:ext>
     </p:extLst>
   </p:cSld>
@@ -2487,7 +2487,7 @@
           <p:cNvPr id="13" name="">
             <a:extLst xmlns:a="http://schemas.openxmlformats.org/drawingml/2006/main">
               <a:ext uri="{FF2B5EF4-FFF2-40B4-BE49-F238E27FC236}">
-                <a16:creationId xmlns:a16="http://schemas.microsoft.com/office/drawing/2014/main" id="{8C8C081C-74E1-4B03-9FB1-7495D8668418}"/>
+                <a16:creationId xmlns:a16="http://schemas.microsoft.com/office/drawing/2014/main" id="{39F26C80-8258-4D6A-82CF-63E0066956B9}"/>
               </a:ext>
             </a:extLst>
           </p:cNvPr>
@@ -2522,7 +2522,7 @@
               </a:defRPr>
             </a:pPr>
             <a:r>
-              <a:t>결론: 내부 PoC는 승인, 고객 제품은 게이트 적용</a:t>
+              <a:t>결론: Community를 기반으로 필요한 기능을 직접 구현</a:t>
             </a:r>
           </a:p>
         </p:txBody>
@@ -2532,7 +2532,7 @@
           <p:cNvPr id="2" name="">
             <a:extLst xmlns:a="http://schemas.openxmlformats.org/drawingml/2006/main">
               <a:ext uri="{FF2B5EF4-FFF2-40B4-BE49-F238E27FC236}">
-                <a16:creationId xmlns:a16="http://schemas.microsoft.com/office/drawing/2014/main" id="{86E5E5F7-E7C7-4F82-9BD8-660D1AE00C97}"/>
+                <a16:creationId xmlns:a16="http://schemas.microsoft.com/office/drawing/2014/main" id="{716CBBAD-755E-4BED-88B4-8D1C863834E0}"/>
               </a:ext>
             </a:extLst>
           </p:cNvPr>
@@ -2577,7 +2577,7 @@
           <p:cNvPr id="3" name="">
             <a:extLst xmlns:a="http://schemas.openxmlformats.org/drawingml/2006/main">
               <a:ext uri="{FF2B5EF4-FFF2-40B4-BE49-F238E27FC236}">
-                <a16:creationId xmlns:a16="http://schemas.microsoft.com/office/drawing/2014/main" id="{405B5A8E-9A89-47F9-96E4-5914ED2E86EC}"/>
+                <a16:creationId xmlns:a16="http://schemas.microsoft.com/office/drawing/2014/main" id="{F596698B-69EF-4F89-8B93-5BD149427BAB}"/>
               </a:ext>
             </a:extLst>
           </p:cNvPr>
@@ -2612,7 +2612,7 @@
               </a:defRPr>
             </a:pPr>
             <a:r>
-              <a:t>Community 기능은 사내 운영자용 실행 엔진으로 사용한다. 고객 접점과 제품 권한은 TechFlow가 소유한다.</a:t>
+              <a:t>Activepieces의 네이티브 기능 분류는 참고정보이며 TechFlow의 자체 구현 범위를 제한하지 않는다.</a:t>
             </a:r>
           </a:p>
         </p:txBody>
@@ -2622,7 +2622,7 @@
           <p:cNvPr id="4" name="">
             <a:extLst xmlns:a="http://schemas.openxmlformats.org/drawingml/2006/main">
               <a:ext uri="{FF2B5EF4-FFF2-40B4-BE49-F238E27FC236}">
-                <a16:creationId xmlns:a16="http://schemas.microsoft.com/office/drawing/2014/main" id="{2906BE6A-946D-4419-BE80-DFAA74DE2EB6}"/>
+                <a16:creationId xmlns:a16="http://schemas.microsoft.com/office/drawing/2014/main" id="{A8858E16-608A-48ED-AA88-BFED34123100}"/>
               </a:ext>
             </a:extLst>
           </p:cNvPr>
@@ -2651,7 +2651,7 @@
           <p:cNvPr id="5" name="">
             <a:extLst xmlns:a="http://schemas.openxmlformats.org/drawingml/2006/main">
               <a:ext uri="{FF2B5EF4-FFF2-40B4-BE49-F238E27FC236}">
-                <a16:creationId xmlns:a16="http://schemas.microsoft.com/office/drawing/2014/main" id="{50B0A833-0EA5-405A-80A9-D08F9E21AAB7}"/>
+                <a16:creationId xmlns:a16="http://schemas.microsoft.com/office/drawing/2014/main" id="{881A4724-CF48-4AB9-8D24-F541919ECA06}"/>
               </a:ext>
             </a:extLst>
           </p:cNvPr>
@@ -2686,7 +2686,7 @@
               </a:defRPr>
             </a:pPr>
             <a:r>
-              <a:t>지금 시작</a:t>
+              <a:t>기본 실행 엔진</a:t>
             </a:r>
           </a:p>
         </p:txBody>
@@ -2696,7 +2696,7 @@
           <p:cNvPr id="6" name="">
             <a:extLst xmlns:a="http://schemas.openxmlformats.org/drawingml/2006/main">
               <a:ext uri="{FF2B5EF4-FFF2-40B4-BE49-F238E27FC236}">
-                <a16:creationId xmlns:a16="http://schemas.microsoft.com/office/drawing/2014/main" id="{9E1EF158-A533-4AB3-BC6A-8B704542383A}"/>
+                <a16:creationId xmlns:a16="http://schemas.microsoft.com/office/drawing/2014/main" id="{6F905CF1-33BC-448D-A972-4B67554B71E2}"/>
               </a:ext>
             </a:extLst>
           </p:cNvPr>
@@ -2731,9 +2731,9 @@
               </a:defRPr>
             </a:pPr>
             <a:r>
-              <a:t>사내 Assist PoC
-Community 0.86.3
-Webhook · Custom Piece · 실행·재시도</a:t>
+              <a:t>Activepieces Community 0.86.3
+Builder · Webhook · Custom Piece
+Queue · Worker · 실행·재시도</a:t>
             </a:r>
           </a:p>
         </p:txBody>
@@ -2743,7 +2743,7 @@
           <p:cNvPr id="7" name="">
             <a:extLst xmlns:a="http://schemas.openxmlformats.org/drawingml/2006/main">
               <a:ext uri="{FF2B5EF4-FFF2-40B4-BE49-F238E27FC236}">
-                <a16:creationId xmlns:a16="http://schemas.microsoft.com/office/drawing/2014/main" id="{C0EDB865-F74F-4602-8415-9874C8377AB6}"/>
+                <a16:creationId xmlns:a16="http://schemas.microsoft.com/office/drawing/2014/main" id="{94FBB472-D9B1-44A3-90D9-9B270D966BE8}"/>
               </a:ext>
             </a:extLst>
           </p:cNvPr>
@@ -2763,7 +2763,7 @@
             </a:avLst>
           </a:prstGeom>
           <a:solidFill xmlns:a="http://schemas.openxmlformats.org/drawingml/2006/main">
-            <a:srgbClr val="FCE8E6"/>
+            <a:srgbClr val="DDF3FF"/>
           </a:solidFill>
         </p:spPr>
       </p:sp>
@@ -2772,7 +2772,7 @@
           <p:cNvPr id="8" name="">
             <a:extLst xmlns:a="http://schemas.openxmlformats.org/drawingml/2006/main">
               <a:ext uri="{FF2B5EF4-FFF2-40B4-BE49-F238E27FC236}">
-                <a16:creationId xmlns:a16="http://schemas.microsoft.com/office/drawing/2014/main" id="{4B26D212-FD41-4584-9FFE-82DBE0F00F28}"/>
+                <a16:creationId xmlns:a16="http://schemas.microsoft.com/office/drawing/2014/main" id="{78E17DCE-2760-41ED-BF57-EED6E7144A76}"/>
               </a:ext>
             </a:extLst>
           </p:cNvPr>
@@ -2799,15 +2799,15 @@
             <a:pPr algn="l">
               <a:defRPr sz="2175">
                 <a:solidFill>
-                  <a:srgbClr val="A52714"/>
-                </a:solidFill>
-                <a:latin typeface="Malgun Gothic"/>
-                <a:ea typeface="Malgun Gothic"/>
-                <a:cs typeface="Malgun Gothic"/>
-              </a:defRPr>
-            </a:pPr>
-            <a:r>
-              <a:t>계약 전 차단</a:t>
+                  <a:srgbClr val="3D8DFF"/>
+                </a:solidFill>
+                <a:latin typeface="Malgun Gothic"/>
+                <a:ea typeface="Malgun Gothic"/>
+                <a:cs typeface="Malgun Gothic"/>
+              </a:defRPr>
+            </a:pPr>
+            <a:r>
+              <a:t>자체 구현 범위</a:t>
             </a:r>
           </a:p>
         </p:txBody>
@@ -2817,7 +2817,7 @@
           <p:cNvPr id="9" name="">
             <a:extLst xmlns:a="http://schemas.openxmlformats.org/drawingml/2006/main">
               <a:ext uri="{FF2B5EF4-FFF2-40B4-BE49-F238E27FC236}">
-                <a16:creationId xmlns:a16="http://schemas.microsoft.com/office/drawing/2014/main" id="{A2BB2266-8874-4850-8106-D4311FAF861F}"/>
+                <a16:creationId xmlns:a16="http://schemas.microsoft.com/office/drawing/2014/main" id="{8022CAA6-CDCD-4107-8E72-AA26C6A38C79}"/>
               </a:ext>
             </a:extLst>
           </p:cNvPr>
@@ -2852,9 +2852,9 @@
               </a:defRPr>
             </a:pPr>
             <a:r>
-              <a:t>고객 직접 UI · Builder 임베딩
-Platform API Key · SSO/RBAC/Audit
-Managed SaaS · 결합 이미지 재배포</a:t>
+              <a:t>TechFlow API · Builder · SSO/RBAC/Audit
+Secret · Template · GitOps · Worker 격리
+고객 공개 여부와 무관하게 구현 가능</a:t>
             </a:r>
           </a:p>
         </p:txBody>
@@ -2864,7 +2864,7 @@
           <p:cNvPr id="10" name="">
             <a:extLst xmlns:a="http://schemas.openxmlformats.org/drawingml/2006/main">
               <a:ext uri="{FF2B5EF4-FFF2-40B4-BE49-F238E27FC236}">
-                <a16:creationId xmlns:a16="http://schemas.microsoft.com/office/drawing/2014/main" id="{B3DA5068-C45E-4B57-9501-2F9A8CFB8032}"/>
+                <a16:creationId xmlns:a16="http://schemas.microsoft.com/office/drawing/2014/main" id="{75C6B94D-D42E-45E0-B300-E7C9F40AB3D8}"/>
               </a:ext>
             </a:extLst>
           </p:cNvPr>
@@ -2893,7 +2893,7 @@
           <p:cNvPr id="11" name="">
             <a:extLst xmlns:a="http://schemas.openxmlformats.org/drawingml/2006/main">
               <a:ext uri="{FF2B5EF4-FFF2-40B4-BE49-F238E27FC236}">
-                <a16:creationId xmlns:a16="http://schemas.microsoft.com/office/drawing/2014/main" id="{9C7E381E-C603-4C49-8BFC-2D28F275C807}"/>
+                <a16:creationId xmlns:a16="http://schemas.microsoft.com/office/drawing/2014/main" id="{799A8170-C91A-4450-9DEF-D6D05BC5FE4D}"/>
               </a:ext>
             </a:extLst>
           </p:cNvPr>
@@ -2938,7 +2938,7 @@
           <p:cNvPr id="12" name="">
             <a:extLst xmlns:a="http://schemas.openxmlformats.org/drawingml/2006/main">
               <a:ext uri="{FF2B5EF4-FFF2-40B4-BE49-F238E27FC236}">
-                <a16:creationId xmlns:a16="http://schemas.microsoft.com/office/drawing/2014/main" id="{84B67F4E-8568-4A95-BF18-8FE30072C083}"/>
+                <a16:creationId xmlns:a16="http://schemas.microsoft.com/office/drawing/2014/main" id="{6F08A07A-45E4-4C8B-A23B-70FF6612A31D}"/>
               </a:ext>
             </a:extLst>
           </p:cNvPr>
@@ -2981,7 +2981,7 @@
     </p:spTree>
     <p:extLst>
       <p:ext uri="{BB962C8B-B14F-4D97-AF65-F5344CB8AC3E}">
-        <p14:creationId xmlns:p14="http://schemas.microsoft.com/office/powerpoint/2010/main" val="1025626079"/>
+        <p14:creationId xmlns:p14="http://schemas.microsoft.com/office/powerpoint/2010/main" val="123220185"/>
       </p:ext>
     </p:extLst>
   </p:cSld>
@@ -3005,7 +3005,7 @@
           <p:cNvPr id="17" name="">
             <a:extLst xmlns:a="http://schemas.openxmlformats.org/drawingml/2006/main">
               <a:ext uri="{FF2B5EF4-FFF2-40B4-BE49-F238E27FC236}">
-                <a16:creationId xmlns:a16="http://schemas.microsoft.com/office/drawing/2014/main" id="{14DA0977-140B-416C-9BE0-C7DEA7D47343}"/>
+                <a16:creationId xmlns:a16="http://schemas.microsoft.com/office/drawing/2014/main" id="{0DCBC855-FE48-4C34-8587-52A8E0F4A732}"/>
               </a:ext>
             </a:extLst>
           </p:cNvPr>
@@ -3050,7 +3050,7 @@
           <p:cNvPr id="2" name="">
             <a:extLst xmlns:a="http://schemas.openxmlformats.org/drawingml/2006/main">
               <a:ext uri="{FF2B5EF4-FFF2-40B4-BE49-F238E27FC236}">
-                <a16:creationId xmlns:a16="http://schemas.microsoft.com/office/drawing/2014/main" id="{1D8528CB-32F6-4FD6-8179-40B42114A5D5}"/>
+                <a16:creationId xmlns:a16="http://schemas.microsoft.com/office/drawing/2014/main" id="{931664BC-95C4-4AB7-BBCC-AD1E3DFAC007}"/>
               </a:ext>
             </a:extLst>
           </p:cNvPr>
@@ -3095,7 +3095,7 @@
           <p:cNvPr id="3" name="">
             <a:extLst xmlns:a="http://schemas.openxmlformats.org/drawingml/2006/main">
               <a:ext uri="{FF2B5EF4-FFF2-40B4-BE49-F238E27FC236}">
-                <a16:creationId xmlns:a16="http://schemas.microsoft.com/office/drawing/2014/main" id="{3973176E-BD88-4DA8-B4A7-1CC6D6C5B9FC}"/>
+                <a16:creationId xmlns:a16="http://schemas.microsoft.com/office/drawing/2014/main" id="{DC5602DC-081D-40AE-B4AC-58723F8397AC}"/>
               </a:ext>
             </a:extLst>
           </p:cNvPr>
@@ -3130,7 +3130,7 @@
               </a:defRPr>
             </a:pPr>
             <a:r>
-              <a:t>“오픈소스 프로젝트”라는 한 문장만으로 고객 배포 권리를 판단할 수 없다.</a:t>
+              <a:t>라이선스 경계는 네이티브 코드 사용 조건이며 자체 기능 구현의 제한선이 아니다.</a:t>
             </a:r>
           </a:p>
         </p:txBody>
@@ -3140,7 +3140,7 @@
           <p:cNvPr id="4" name="">
             <a:extLst xmlns:a="http://schemas.openxmlformats.org/drawingml/2006/main">
               <a:ext uri="{FF2B5EF4-FFF2-40B4-BE49-F238E27FC236}">
-                <a16:creationId xmlns:a16="http://schemas.microsoft.com/office/drawing/2014/main" id="{9D7D373B-AA5D-4F19-A405-206BE5DC18D6}"/>
+                <a16:creationId xmlns:a16="http://schemas.microsoft.com/office/drawing/2014/main" id="{E281D7C6-C014-4F27-954B-3996BF5CFAF8}"/>
               </a:ext>
             </a:extLst>
           </p:cNvPr>
@@ -3169,7 +3169,7 @@
           <p:cNvPr id="5" name="">
             <a:extLst xmlns:a="http://schemas.openxmlformats.org/drawingml/2006/main">
               <a:ext uri="{FF2B5EF4-FFF2-40B4-BE49-F238E27FC236}">
-                <a16:creationId xmlns:a16="http://schemas.microsoft.com/office/drawing/2014/main" id="{498FE90B-5F0E-4A59-A4C9-2ADF8472F7F9}"/>
+                <a16:creationId xmlns:a16="http://schemas.microsoft.com/office/drawing/2014/main" id="{6A57A265-89AE-490A-B266-99E6C75EE39C}"/>
               </a:ext>
             </a:extLst>
           </p:cNvPr>
@@ -3214,7 +3214,7 @@
           <p:cNvPr id="6" name="">
             <a:extLst xmlns:a="http://schemas.openxmlformats.org/drawingml/2006/main">
               <a:ext uri="{FF2B5EF4-FFF2-40B4-BE49-F238E27FC236}">
-                <a16:creationId xmlns:a16="http://schemas.microsoft.com/office/drawing/2014/main" id="{8349415B-9412-4FE6-90CA-7807FFA31B31}"/>
+                <a16:creationId xmlns:a16="http://schemas.microsoft.com/office/drawing/2014/main" id="{E9BE9AD0-110D-416A-85B0-D4433B64B1DA}"/>
               </a:ext>
             </a:extLst>
           </p:cNvPr>
@@ -3259,7 +3259,7 @@
           <p:cNvPr id="7" name="">
             <a:extLst xmlns:a="http://schemas.openxmlformats.org/drawingml/2006/main">
               <a:ext uri="{FF2B5EF4-FFF2-40B4-BE49-F238E27FC236}">
-                <a16:creationId xmlns:a16="http://schemas.microsoft.com/office/drawing/2014/main" id="{BBE0D8C4-3956-4F36-B2AD-45FAEF483AD0}"/>
+                <a16:creationId xmlns:a16="http://schemas.microsoft.com/office/drawing/2014/main" id="{872A83EF-7A21-4345-86D8-C27B2C0AD6BF}"/>
               </a:ext>
             </a:extLst>
           </p:cNvPr>
@@ -3306,7 +3306,7 @@
           <p:cNvPr id="8" name="">
             <a:extLst xmlns:a="http://schemas.openxmlformats.org/drawingml/2006/main">
               <a:ext uri="{FF2B5EF4-FFF2-40B4-BE49-F238E27FC236}">
-                <a16:creationId xmlns:a16="http://schemas.microsoft.com/office/drawing/2014/main" id="{B0EB783F-024C-454F-9801-855E322CD2FF}"/>
+                <a16:creationId xmlns:a16="http://schemas.microsoft.com/office/drawing/2014/main" id="{2DB26769-5142-496B-8B93-996B1968E680}"/>
               </a:ext>
             </a:extLst>
           </p:cNvPr>
@@ -3335,7 +3335,7 @@
           <p:cNvPr id="9" name="">
             <a:extLst xmlns:a="http://schemas.openxmlformats.org/drawingml/2006/main">
               <a:ext uri="{FF2B5EF4-FFF2-40B4-BE49-F238E27FC236}">
-                <a16:creationId xmlns:a16="http://schemas.microsoft.com/office/drawing/2014/main" id="{7A1BA6D8-5C60-4B07-9CAC-C3AB7E005E35}"/>
+                <a16:creationId xmlns:a16="http://schemas.microsoft.com/office/drawing/2014/main" id="{DB6FA64C-AEC6-4716-8638-407E67609769}"/>
               </a:ext>
             </a:extLst>
           </p:cNvPr>
@@ -3380,7 +3380,7 @@
           <p:cNvPr id="10" name="">
             <a:extLst xmlns:a="http://schemas.openxmlformats.org/drawingml/2006/main">
               <a:ext uri="{FF2B5EF4-FFF2-40B4-BE49-F238E27FC236}">
-                <a16:creationId xmlns:a16="http://schemas.microsoft.com/office/drawing/2014/main" id="{F3CACFB1-D73F-47DE-8076-13CE7AFA72C1}"/>
+                <a16:creationId xmlns:a16="http://schemas.microsoft.com/office/drawing/2014/main" id="{30912F2A-6379-4C2C-9C66-3A746CE6D3D2}"/>
               </a:ext>
             </a:extLst>
           </p:cNvPr>
@@ -3425,7 +3425,7 @@
           <p:cNvPr id="11" name="">
             <a:extLst xmlns:a="http://schemas.openxmlformats.org/drawingml/2006/main">
               <a:ext uri="{FF2B5EF4-FFF2-40B4-BE49-F238E27FC236}">
-                <a16:creationId xmlns:a16="http://schemas.microsoft.com/office/drawing/2014/main" id="{DC89F8A7-9110-47D6-B3CC-8D576EEE189E}"/>
+                <a16:creationId xmlns:a16="http://schemas.microsoft.com/office/drawing/2014/main" id="{FF9C59BF-A641-421B-BA00-818D3CC60F5E}"/>
               </a:ext>
             </a:extLst>
           </p:cNvPr>
@@ -3472,7 +3472,7 @@
           <p:cNvPr id="12" name="">
             <a:extLst xmlns:a="http://schemas.openxmlformats.org/drawingml/2006/main">
               <a:ext uri="{FF2B5EF4-FFF2-40B4-BE49-F238E27FC236}">
-                <a16:creationId xmlns:a16="http://schemas.microsoft.com/office/drawing/2014/main" id="{FC5F3D58-1045-49ED-A668-90E79C74FFA0}"/>
+                <a16:creationId xmlns:a16="http://schemas.microsoft.com/office/drawing/2014/main" id="{EC2CF8CC-A0D1-497B-B167-65A377787FC6}"/>
               </a:ext>
             </a:extLst>
           </p:cNvPr>
@@ -3501,7 +3501,7 @@
           <p:cNvPr id="13" name="">
             <a:extLst xmlns:a="http://schemas.openxmlformats.org/drawingml/2006/main">
               <a:ext uri="{FF2B5EF4-FFF2-40B4-BE49-F238E27FC236}">
-                <a16:creationId xmlns:a16="http://schemas.microsoft.com/office/drawing/2014/main" id="{FB3ECEDF-2713-4325-A709-9A71B5CC8ADB}"/>
+                <a16:creationId xmlns:a16="http://schemas.microsoft.com/office/drawing/2014/main" id="{C377852E-5627-43FE-9C74-E70CFC823630}"/>
               </a:ext>
             </a:extLst>
           </p:cNvPr>
@@ -3546,7 +3546,7 @@
           <p:cNvPr id="14" name="">
             <a:extLst xmlns:a="http://schemas.openxmlformats.org/drawingml/2006/main">
               <a:ext uri="{FF2B5EF4-FFF2-40B4-BE49-F238E27FC236}">
-                <a16:creationId xmlns:a16="http://schemas.microsoft.com/office/drawing/2014/main" id="{310BC05B-DCC8-465B-8278-5A3B0BC5316D}"/>
+                <a16:creationId xmlns:a16="http://schemas.microsoft.com/office/drawing/2014/main" id="{FE9E73ED-3AB1-4358-94F8-0B27A9553D98}"/>
               </a:ext>
             </a:extLst>
           </p:cNvPr>
@@ -3591,7 +3591,7 @@
           <p:cNvPr id="15" name="">
             <a:extLst xmlns:a="http://schemas.openxmlformats.org/drawingml/2006/main">
               <a:ext uri="{FF2B5EF4-FFF2-40B4-BE49-F238E27FC236}">
-                <a16:creationId xmlns:a16="http://schemas.microsoft.com/office/drawing/2014/main" id="{46F2ABFB-31BB-4E68-82C0-BFE60A65A7C9}"/>
+                <a16:creationId xmlns:a16="http://schemas.microsoft.com/office/drawing/2014/main" id="{A51C6B0D-C121-4580-9D53-3FD2BAC50456}"/>
               </a:ext>
             </a:extLst>
           </p:cNvPr>
@@ -3638,7 +3638,7 @@
           <p:cNvPr id="16" name="">
             <a:extLst xmlns:a="http://schemas.openxmlformats.org/drawingml/2006/main">
               <a:ext uri="{FF2B5EF4-FFF2-40B4-BE49-F238E27FC236}">
-                <a16:creationId xmlns:a16="http://schemas.microsoft.com/office/drawing/2014/main" id="{EF587B74-7ED5-4E64-AF82-A8902D16F62F}"/>
+                <a16:creationId xmlns:a16="http://schemas.microsoft.com/office/drawing/2014/main" id="{AFB2DCD6-27F9-488B-9D11-2F581B7EA62B}"/>
               </a:ext>
             </a:extLst>
           </p:cNvPr>
@@ -3681,7 +3681,7 @@
     </p:spTree>
     <p:extLst>
       <p:ext uri="{BB962C8B-B14F-4D97-AF65-F5344CB8AC3E}">
-        <p14:creationId xmlns:p14="http://schemas.microsoft.com/office/powerpoint/2010/main" val="721183883"/>
+        <p14:creationId xmlns:p14="http://schemas.microsoft.com/office/powerpoint/2010/main" val="6391363"/>
       </p:ext>
     </p:extLst>
   </p:cSld>
@@ -3705,7 +3705,7 @@
           <p:cNvPr id="6" name="">
             <a:extLst xmlns:a="http://schemas.openxmlformats.org/drawingml/2006/main">
               <a:ext uri="{FF2B5EF4-FFF2-40B4-BE49-F238E27FC236}">
-                <a16:creationId xmlns:a16="http://schemas.microsoft.com/office/drawing/2014/main" id="{85FCD407-F35F-4608-BD81-E4B16C8534E9}"/>
+                <a16:creationId xmlns:a16="http://schemas.microsoft.com/office/drawing/2014/main" id="{4CCBA5AF-24B4-4EE4-8654-5B8C2D7B6D1B}"/>
               </a:ext>
             </a:extLst>
           </p:cNvPr>
@@ -3740,7 +3740,7 @@
               </a:defRPr>
             </a:pPr>
             <a:r>
-              <a:t>기능 매트릭스: 실행은 Community, 제품 제어는 TechFlow</a:t>
+              <a:t>기능 매트릭스: Community 위에 제품 기능을 자유롭게 확장</a:t>
             </a:r>
           </a:p>
         </p:txBody>
@@ -3750,7 +3750,7 @@
           <p:cNvPr id="2" name="">
             <a:extLst xmlns:a="http://schemas.openxmlformats.org/drawingml/2006/main">
               <a:ext uri="{FF2B5EF4-FFF2-40B4-BE49-F238E27FC236}">
-                <a16:creationId xmlns:a16="http://schemas.microsoft.com/office/drawing/2014/main" id="{4624619F-064E-403F-A13D-C1B70C45A879}"/>
+                <a16:creationId xmlns:a16="http://schemas.microsoft.com/office/drawing/2014/main" id="{E474AA26-8423-42C4-BC3C-16269DD454CB}"/>
               </a:ext>
             </a:extLst>
           </p:cNvPr>
@@ -3795,7 +3795,7 @@
           <p:cNvPr id="3" name="">
             <a:extLst xmlns:a="http://schemas.openxmlformats.org/drawingml/2006/main">
               <a:ext uri="{FF2B5EF4-FFF2-40B4-BE49-F238E27FC236}">
-                <a16:creationId xmlns:a16="http://schemas.microsoft.com/office/drawing/2014/main" id="{E1E14E2F-8FC9-49E4-A55A-53C2A4C67289}"/>
+                <a16:creationId xmlns:a16="http://schemas.microsoft.com/office/drawing/2014/main" id="{F0513D8B-234D-4223-A8D6-C9186B48805F}"/>
               </a:ext>
             </a:extLst>
           </p:cNvPr>
@@ -3874,7 +3874,7 @@
                     <a:lstStyle/>
                     <a:p>
                       <a:r>
-                        <a:t>Community PoC</a:t>
+                        <a:t>Community 기반</a:t>
                       </a:r>
                     </a:p>
                   </a:txBody>
@@ -3886,7 +3886,7 @@
                     <a:lstStyle/>
                     <a:p>
                       <a:r>
-                        <a:t>고객 제품</a:t>
+                        <a:t>제품 구현</a:t>
                       </a:r>
                     </a:p>
                   </a:txBody>
@@ -3898,7 +3898,7 @@
                     <a:lstStyle/>
                     <a:p>
                       <a:r>
-                        <a:t>TechFlow 대안</a:t>
+                        <a:t>TechFlow 방향</a:t>
                       </a:r>
                     </a:p>
                   </a:txBody>
@@ -3924,7 +3924,7 @@
                     <a:lstStyle/>
                     <a:p>
                       <a:r>
-                        <a:t>승인</a:t>
+                        <a:t>기본 사용</a:t>
                       </a:r>
                     </a:p>
                   </a:txBody>
@@ -3936,7 +3936,7 @@
                     <a:lstStyle/>
                     <a:p>
                       <a:r>
-                        <a:t>관리자 전용</a:t>
+                        <a:t>확장</a:t>
                       </a:r>
                     </a:p>
                   </a:txBody>
@@ -3974,7 +3974,7 @@
                     <a:lstStyle/>
                     <a:p>
                       <a:r>
-                        <a:t>승인</a:t>
+                        <a:t>기본 사용</a:t>
                       </a:r>
                     </a:p>
                   </a:txBody>
@@ -3986,7 +3986,7 @@
                     <a:lstStyle/>
                     <a:p>
                       <a:r>
-                        <a:t>승인</a:t>
+                        <a:t>확장</a:t>
                       </a:r>
                     </a:p>
                   </a:txBody>
@@ -4012,7 +4012,7 @@
                     <a:lstStyle/>
                     <a:p>
                       <a:r>
-                        <a:t>Platform API Key</a:t>
+                        <a:t>제품 API</a:t>
                       </a:r>
                     </a:p>
                   </a:txBody>
@@ -4024,7 +4024,7 @@
                     <a:lstStyle/>
                     <a:p>
                       <a:r>
-                        <a:t>미사용</a:t>
+                        <a:t>별도 구현</a:t>
                       </a:r>
                     </a:p>
                   </a:txBody>
@@ -4036,7 +4036,7 @@
                     <a:lstStyle/>
                     <a:p>
                       <a:r>
-                        <a:t>계약 필요</a:t>
+                        <a:t>자체 구현</a:t>
                       </a:r>
                     </a:p>
                   </a:txBody>
@@ -4074,7 +4074,7 @@
                     <a:lstStyle/>
                     <a:p>
                       <a:r>
-                        <a:t>미사용</a:t>
+                        <a:t>별도 구현</a:t>
                       </a:r>
                     </a:p>
                   </a:txBody>
@@ -4086,7 +4086,7 @@
                     <a:lstStyle/>
                     <a:p>
                       <a:r>
-                        <a:t>계약 필요</a:t>
+                        <a:t>자체 구현</a:t>
                       </a:r>
                     </a:p>
                   </a:txBody>
@@ -4124,7 +4124,7 @@
                     <a:lstStyle/>
                     <a:p>
                       <a:r>
-                        <a:t>미사용</a:t>
+                        <a:t>별도 구현</a:t>
                       </a:r>
                     </a:p>
                   </a:txBody>
@@ -4136,7 +4136,7 @@
                     <a:lstStyle/>
                     <a:p>
                       <a:r>
-                        <a:t>계약 필요</a:t>
+                        <a:t>자체 구현</a:t>
                       </a:r>
                     </a:p>
                   </a:txBody>
@@ -4174,7 +4174,7 @@
                     <a:lstStyle/>
                     <a:p>
                       <a:r>
-                        <a:t>제한</a:t>
+                        <a:t>별도 구현</a:t>
                       </a:r>
                     </a:p>
                   </a:txBody>
@@ -4186,7 +4186,7 @@
                     <a:lstStyle/>
                     <a:p>
                       <a:r>
-                        <a:t>계약 필요</a:t>
+                        <a:t>자체 구현</a:t>
                       </a:r>
                     </a:p>
                   </a:txBody>
@@ -4212,7 +4212,7 @@
                     <a:lstStyle/>
                     <a:p>
                       <a:r>
-                        <a:t>Embed·Branding</a:t>
+                        <a:t>Builder·Branding</a:t>
                       </a:r>
                     </a:p>
                   </a:txBody>
@@ -4224,7 +4224,7 @@
                     <a:lstStyle/>
                     <a:p>
                       <a:r>
-                        <a:t>미사용</a:t>
+                        <a:t>별도 구현</a:t>
                       </a:r>
                     </a:p>
                   </a:txBody>
@@ -4236,7 +4236,7 @@
                     <a:lstStyle/>
                     <a:p>
                       <a:r>
-                        <a:t>계약 필요</a:t>
+                        <a:t>자체 구현</a:t>
                       </a:r>
                     </a:p>
                   </a:txBody>
@@ -4262,7 +4262,7 @@
                     <a:lstStyle/>
                     <a:p>
                       <a:r>
-                        <a:t>Git·Template·Worker Group</a:t>
+                        <a:t>Git·Template·Worker 격리</a:t>
                       </a:r>
                     </a:p>
                   </a:txBody>
@@ -4274,7 +4274,7 @@
                     <a:lstStyle/>
                     <a:p>
                       <a:r>
-                        <a:t>대체</a:t>
+                        <a:t>별도 구현</a:t>
                       </a:r>
                     </a:p>
                   </a:txBody>
@@ -4286,7 +4286,7 @@
                     <a:lstStyle/>
                     <a:p>
                       <a:r>
-                        <a:t>계약 필요</a:t>
+                        <a:t>자체 구현</a:t>
                       </a:r>
                     </a:p>
                   </a:txBody>
@@ -4298,7 +4298,7 @@
                     <a:lstStyle/>
                     <a:p>
                       <a:r>
-                        <a:t>GitOps·전용 인스턴스</a:t>
+                        <a:t>GitOps·Worker Pool</a:t>
                       </a:r>
                     </a:p>
                   </a:txBody>
@@ -4314,7 +4314,7 @@
           <p:cNvPr id="5" name="">
             <a:extLst xmlns:a="http://schemas.openxmlformats.org/drawingml/2006/main">
               <a:ext uri="{FF2B5EF4-FFF2-40B4-BE49-F238E27FC236}">
-                <a16:creationId xmlns:a16="http://schemas.microsoft.com/office/drawing/2014/main" id="{7DA80057-BE50-47BC-B5AC-5975BA8AC572}"/>
+                <a16:creationId xmlns:a16="http://schemas.microsoft.com/office/drawing/2014/main" id="{5B564AA2-FF16-42A9-BD86-FD450E4910B9}"/>
               </a:ext>
             </a:extLst>
           </p:cNvPr>
@@ -4357,7 +4357,7 @@
     </p:spTree>
     <p:extLst>
       <p:ext uri="{BB962C8B-B14F-4D97-AF65-F5344CB8AC3E}">
-        <p14:creationId xmlns:p14="http://schemas.microsoft.com/office/powerpoint/2010/main" val="2058681817"/>
+        <p14:creationId xmlns:p14="http://schemas.microsoft.com/office/powerpoint/2010/main" val="211250199"/>
       </p:ext>
     </p:extLst>
   </p:cSld>
@@ -4381,7 +4381,7 @@
           <p:cNvPr id="34" name="">
             <a:extLst xmlns:a="http://schemas.openxmlformats.org/drawingml/2006/main">
               <a:ext uri="{FF2B5EF4-FFF2-40B4-BE49-F238E27FC236}">
-                <a16:creationId xmlns:a16="http://schemas.microsoft.com/office/drawing/2014/main" id="{AD66E9E8-B8D2-4962-BA5F-8E27B748563A}"/>
+                <a16:creationId xmlns:a16="http://schemas.microsoft.com/office/drawing/2014/main" id="{7E5721FF-CBD3-4FB9-8A80-F18837A1A8E0}"/>
               </a:ext>
             </a:extLst>
           </p:cNvPr>
@@ -4416,7 +4416,7 @@
               </a:defRPr>
             </a:pPr>
             <a:r>
-              <a:t>시나리오별 판정</a:t>
+              <a:t>모든 제품 시나리오는 구현 가능</a:t>
             </a:r>
           </a:p>
         </p:txBody>
@@ -4426,7 +4426,7 @@
           <p:cNvPr id="2" name="">
             <a:extLst xmlns:a="http://schemas.openxmlformats.org/drawingml/2006/main">
               <a:ext uri="{FF2B5EF4-FFF2-40B4-BE49-F238E27FC236}">
-                <a16:creationId xmlns:a16="http://schemas.microsoft.com/office/drawing/2014/main" id="{4D39B5BD-00A3-4821-9F20-49861814F049}"/>
+                <a16:creationId xmlns:a16="http://schemas.microsoft.com/office/drawing/2014/main" id="{C14B0C49-F38A-4701-B999-C71EC515AA08}"/>
               </a:ext>
             </a:extLst>
           </p:cNvPr>
@@ -4471,7 +4471,7 @@
           <p:cNvPr id="3" name="">
             <a:extLst xmlns:a="http://schemas.openxmlformats.org/drawingml/2006/main">
               <a:ext uri="{FF2B5EF4-FFF2-40B4-BE49-F238E27FC236}">
-                <a16:creationId xmlns:a16="http://schemas.microsoft.com/office/drawing/2014/main" id="{86D441E7-DB09-4AF7-AC05-0CA03581E7A3}"/>
+                <a16:creationId xmlns:a16="http://schemas.microsoft.com/office/drawing/2014/main" id="{F795118E-F8F7-4005-ACD4-7B9BFB3E797C}"/>
               </a:ext>
             </a:extLst>
           </p:cNvPr>
@@ -4506,7 +4506,7 @@
               </a:defRPr>
             </a:pPr>
             <a:r>
-              <a:t>고객 접점이 커질수록 Community 권리만으로 결정하지 않는다.</a:t>
+              <a:t>고객 공개 여부는 구현 판정과 분리하고 제품 책임자가 결정한다.</a:t>
             </a:r>
           </a:p>
         </p:txBody>
@@ -4516,7 +4516,7 @@
           <p:cNvPr id="4" name="">
             <a:extLst xmlns:a="http://schemas.openxmlformats.org/drawingml/2006/main">
               <a:ext uri="{FF2B5EF4-FFF2-40B4-BE49-F238E27FC236}">
-                <a16:creationId xmlns:a16="http://schemas.microsoft.com/office/drawing/2014/main" id="{88166C6C-E859-4937-A577-197FEC4D1213}"/>
+                <a16:creationId xmlns:a16="http://schemas.microsoft.com/office/drawing/2014/main" id="{4A3D74B3-6D4E-4D93-9054-CD4BB628FC8B}"/>
               </a:ext>
             </a:extLst>
           </p:cNvPr>
@@ -4545,7 +4545,7 @@
           <p:cNvPr id="5" name="">
             <a:extLst xmlns:a="http://schemas.openxmlformats.org/drawingml/2006/main">
               <a:ext uri="{FF2B5EF4-FFF2-40B4-BE49-F238E27FC236}">
-                <a16:creationId xmlns:a16="http://schemas.microsoft.com/office/drawing/2014/main" id="{69C52A1C-CC38-4672-86E6-7617A1A1E54B}"/>
+                <a16:creationId xmlns:a16="http://schemas.microsoft.com/office/drawing/2014/main" id="{16C6E615-FC1C-45CF-BBA7-53C895FC0A07}"/>
               </a:ext>
             </a:extLst>
           </p:cNvPr>
@@ -4590,7 +4590,7 @@
           <p:cNvPr id="6" name="">
             <a:extLst xmlns:a="http://schemas.openxmlformats.org/drawingml/2006/main">
               <a:ext uri="{FF2B5EF4-FFF2-40B4-BE49-F238E27FC236}">
-                <a16:creationId xmlns:a16="http://schemas.microsoft.com/office/drawing/2014/main" id="{F9AB21BA-5552-4186-B123-937C845A1CE9}"/>
+                <a16:creationId xmlns:a16="http://schemas.microsoft.com/office/drawing/2014/main" id="{DF1E9480-24BD-4E6D-A42C-144C2CBBC23C}"/>
               </a:ext>
             </a:extLst>
           </p:cNvPr>
@@ -4635,7 +4635,7 @@
           <p:cNvPr id="7" name="">
             <a:extLst xmlns:a="http://schemas.openxmlformats.org/drawingml/2006/main">
               <a:ext uri="{FF2B5EF4-FFF2-40B4-BE49-F238E27FC236}">
-                <a16:creationId xmlns:a16="http://schemas.microsoft.com/office/drawing/2014/main" id="{FC721362-9077-4350-8E17-B24D9B0C83B7}"/>
+                <a16:creationId xmlns:a16="http://schemas.microsoft.com/office/drawing/2014/main" id="{9DE8A11F-4691-4309-8866-E7D42C0A34C0}"/>
               </a:ext>
             </a:extLst>
           </p:cNvPr>
@@ -4680,7 +4680,7 @@
           <p:cNvPr id="8" name="">
             <a:extLst xmlns:a="http://schemas.openxmlformats.org/drawingml/2006/main">
               <a:ext uri="{FF2B5EF4-FFF2-40B4-BE49-F238E27FC236}">
-                <a16:creationId xmlns:a16="http://schemas.microsoft.com/office/drawing/2014/main" id="{BCC0F6D1-EAD9-4D47-875A-34A5F35970C2}"/>
+                <a16:creationId xmlns:a16="http://schemas.microsoft.com/office/drawing/2014/main" id="{FDDD9D53-B09F-49A8-BEA8-FF308564578E}"/>
               </a:ext>
             </a:extLst>
           </p:cNvPr>
@@ -4715,7 +4715,7 @@
               </a:defRPr>
             </a:pPr>
             <a:r>
-              <a:t>내부 운영자·CE 기능만</a:t>
+              <a:t>Community 기반으로 즉시 진행</a:t>
             </a:r>
           </a:p>
         </p:txBody>
@@ -4725,7 +4725,7 @@
           <p:cNvPr id="9" name="">
             <a:extLst xmlns:a="http://schemas.openxmlformats.org/drawingml/2006/main">
               <a:ext uri="{FF2B5EF4-FFF2-40B4-BE49-F238E27FC236}">
-                <a16:creationId xmlns:a16="http://schemas.microsoft.com/office/drawing/2014/main" id="{11B92738-7DF2-4895-901D-2DB8C07ECC4D}"/>
+                <a16:creationId xmlns:a16="http://schemas.microsoft.com/office/drawing/2014/main" id="{45A22FF2-130D-41DF-92AE-CFBB8D54E825}"/>
               </a:ext>
             </a:extLst>
           </p:cNvPr>
@@ -4745,7 +4745,7 @@
             </a:avLst>
           </a:prstGeom>
           <a:solidFill xmlns:a="http://schemas.openxmlformats.org/drawingml/2006/main">
-            <a:srgbClr val="FFF4D6"/>
+            <a:srgbClr val="E8F5ED"/>
           </a:solidFill>
         </p:spPr>
       </p:sp>
@@ -4754,7 +4754,7 @@
           <p:cNvPr id="10" name="">
             <a:extLst xmlns:a="http://schemas.openxmlformats.org/drawingml/2006/main">
               <a:ext uri="{FF2B5EF4-FFF2-40B4-BE49-F238E27FC236}">
-                <a16:creationId xmlns:a16="http://schemas.microsoft.com/office/drawing/2014/main" id="{19EB1251-910A-479A-91A8-125E970CCFAE}"/>
+                <a16:creationId xmlns:a16="http://schemas.microsoft.com/office/drawing/2014/main" id="{6CF60C40-1268-4A79-B569-92A671F6D43D}"/>
               </a:ext>
             </a:extLst>
           </p:cNvPr>
@@ -4781,7 +4781,7 @@
             <a:pPr algn="l">
               <a:defRPr sz="2850">
                 <a:solidFill>
-                  <a:srgbClr val="8A5A00"/>
+                  <a:srgbClr val="177245"/>
                 </a:solidFill>
                 <a:latin typeface="Malgun Gothic"/>
                 <a:ea typeface="Malgun Gothic"/>
@@ -4799,7 +4799,7 @@
           <p:cNvPr id="11" name="">
             <a:extLst xmlns:a="http://schemas.openxmlformats.org/drawingml/2006/main">
               <a:ext uri="{FF2B5EF4-FFF2-40B4-BE49-F238E27FC236}">
-                <a16:creationId xmlns:a16="http://schemas.microsoft.com/office/drawing/2014/main" id="{D88E5B37-D4E8-4BB3-A1BB-F2DD24D28436}"/>
+                <a16:creationId xmlns:a16="http://schemas.microsoft.com/office/drawing/2014/main" id="{2DEC27C5-52E4-469A-9214-4722D8F3EE5F}"/>
               </a:ext>
             </a:extLst>
           </p:cNvPr>
@@ -4834,7 +4834,7 @@
               </a:defRPr>
             </a:pPr>
             <a:r>
-              <a:t>고객 전용·UI 비노출</a:t>
+              <a:t>고객 전용 인스턴스</a:t>
             </a:r>
           </a:p>
         </p:txBody>
@@ -4844,7 +4844,7 @@
           <p:cNvPr id="12" name="">
             <a:extLst xmlns:a="http://schemas.openxmlformats.org/drawingml/2006/main">
               <a:ext uri="{FF2B5EF4-FFF2-40B4-BE49-F238E27FC236}">
-                <a16:creationId xmlns:a16="http://schemas.microsoft.com/office/drawing/2014/main" id="{D3B56511-48E3-493E-AB04-30D8FED5AA60}"/>
+                <a16:creationId xmlns:a16="http://schemas.microsoft.com/office/drawing/2014/main" id="{92F00EE8-077A-416E-A45A-57170A7BA2DE}"/>
               </a:ext>
             </a:extLst>
           </p:cNvPr>
@@ -4871,15 +4871,15 @@
             <a:pPr algn="r">
               <a:defRPr sz="1350">
                 <a:solidFill>
-                  <a:srgbClr val="8A5A00"/>
-                </a:solidFill>
-                <a:latin typeface="Malgun Gothic"/>
-                <a:ea typeface="Malgun Gothic"/>
-                <a:cs typeface="Malgun Gothic"/>
-              </a:defRPr>
-            </a:pPr>
-            <a:r>
-              <a:t>조건부</a:t>
+                  <a:srgbClr val="177245"/>
+                </a:solidFill>
+                <a:latin typeface="Malgun Gothic"/>
+                <a:ea typeface="Malgun Gothic"/>
+                <a:cs typeface="Malgun Gothic"/>
+              </a:defRPr>
+            </a:pPr>
+            <a:r>
+              <a:t>구현 가능</a:t>
             </a:r>
           </a:p>
         </p:txBody>
@@ -4889,7 +4889,7 @@
           <p:cNvPr id="13" name="">
             <a:extLst xmlns:a="http://schemas.openxmlformats.org/drawingml/2006/main">
               <a:ext uri="{FF2B5EF4-FFF2-40B4-BE49-F238E27FC236}">
-                <a16:creationId xmlns:a16="http://schemas.microsoft.com/office/drawing/2014/main" id="{70439E80-525A-40D9-B432-062DEBBE8C66}"/>
+                <a16:creationId xmlns:a16="http://schemas.microsoft.com/office/drawing/2014/main" id="{36D02B2C-B9D7-43A7-962A-089E5B55950E}"/>
               </a:ext>
             </a:extLst>
           </p:cNvPr>
@@ -4924,7 +4924,7 @@
               </a:defRPr>
             </a:pPr>
             <a:r>
-              <a:t>이미지 재배포 서면 확인</a:t>
+              <a:t>배포·관리 기능까지 자체 구현</a:t>
             </a:r>
           </a:p>
         </p:txBody>
@@ -4934,7 +4934,7 @@
           <p:cNvPr id="14" name="">
             <a:extLst xmlns:a="http://schemas.openxmlformats.org/drawingml/2006/main">
               <a:ext uri="{FF2B5EF4-FFF2-40B4-BE49-F238E27FC236}">
-                <a16:creationId xmlns:a16="http://schemas.microsoft.com/office/drawing/2014/main" id="{7449B523-74E5-41E3-A078-0FD1B91DDB30}"/>
+                <a16:creationId xmlns:a16="http://schemas.microsoft.com/office/drawing/2014/main" id="{C1FFD58A-4EBC-4882-BF43-63AA0381D702}"/>
               </a:ext>
             </a:extLst>
           </p:cNvPr>
@@ -4954,7 +4954,7 @@
             </a:avLst>
           </a:prstGeom>
           <a:solidFill xmlns:a="http://schemas.openxmlformats.org/drawingml/2006/main">
-            <a:srgbClr val="FCE8E6"/>
+            <a:srgbClr val="E8F5ED"/>
           </a:solidFill>
         </p:spPr>
       </p:sp>
@@ -4963,7 +4963,7 @@
           <p:cNvPr id="15" name="">
             <a:extLst xmlns:a="http://schemas.openxmlformats.org/drawingml/2006/main">
               <a:ext uri="{FF2B5EF4-FFF2-40B4-BE49-F238E27FC236}">
-                <a16:creationId xmlns:a16="http://schemas.microsoft.com/office/drawing/2014/main" id="{8CE00F76-D929-4405-9BED-F188367C86BB}"/>
+                <a16:creationId xmlns:a16="http://schemas.microsoft.com/office/drawing/2014/main" id="{3698087B-0CDF-41D7-A2A8-81BA2DC22F09}"/>
               </a:ext>
             </a:extLst>
           </p:cNvPr>
@@ -4990,7 +4990,7 @@
             <a:pPr algn="l">
               <a:defRPr sz="2850">
                 <a:solidFill>
-                  <a:srgbClr val="A52714"/>
+                  <a:srgbClr val="177245"/>
                 </a:solidFill>
                 <a:latin typeface="Malgun Gothic"/>
                 <a:ea typeface="Malgun Gothic"/>
@@ -5008,7 +5008,7 @@
           <p:cNvPr id="16" name="">
             <a:extLst xmlns:a="http://schemas.openxmlformats.org/drawingml/2006/main">
               <a:ext uri="{FF2B5EF4-FFF2-40B4-BE49-F238E27FC236}">
-                <a16:creationId xmlns:a16="http://schemas.microsoft.com/office/drawing/2014/main" id="{B33B4133-853F-43D8-801C-462D5289A72D}"/>
+                <a16:creationId xmlns:a16="http://schemas.microsoft.com/office/drawing/2014/main" id="{5ED807BD-D4CE-480C-88C9-E8DC6C703586}"/>
               </a:ext>
             </a:extLst>
           </p:cNvPr>
@@ -5043,7 +5043,7 @@
               </a:defRPr>
             </a:pPr>
             <a:r>
-              <a:t>고객 UI 직접 사용</a:t>
+              <a:t>고객용 구성·관리 UI</a:t>
             </a:r>
           </a:p>
         </p:txBody>
@@ -5053,7 +5053,7 @@
           <p:cNvPr id="17" name="">
             <a:extLst xmlns:a="http://schemas.openxmlformats.org/drawingml/2006/main">
               <a:ext uri="{FF2B5EF4-FFF2-40B4-BE49-F238E27FC236}">
-                <a16:creationId xmlns:a16="http://schemas.microsoft.com/office/drawing/2014/main" id="{1E882E57-7B0B-46DF-826D-B8FBA337B3C7}"/>
+                <a16:creationId xmlns:a16="http://schemas.microsoft.com/office/drawing/2014/main" id="{7C9996CB-AF8C-4ED5-8D4B-D500B902F73C}"/>
               </a:ext>
             </a:extLst>
           </p:cNvPr>
@@ -5080,15 +5080,15 @@
             <a:pPr algn="r">
               <a:defRPr sz="1350">
                 <a:solidFill>
-                  <a:srgbClr val="A52714"/>
-                </a:solidFill>
-                <a:latin typeface="Malgun Gothic"/>
-                <a:ea typeface="Malgun Gothic"/>
-                <a:cs typeface="Malgun Gothic"/>
-              </a:defRPr>
-            </a:pPr>
-            <a:r>
-              <a:t>계약 필요</a:t>
+                  <a:srgbClr val="177245"/>
+                </a:solidFill>
+                <a:latin typeface="Malgun Gothic"/>
+                <a:ea typeface="Malgun Gothic"/>
+                <a:cs typeface="Malgun Gothic"/>
+              </a:defRPr>
+            </a:pPr>
+            <a:r>
+              <a:t>자체 구현</a:t>
             </a:r>
           </a:p>
         </p:txBody>
@@ -5098,7 +5098,7 @@
           <p:cNvPr id="18" name="">
             <a:extLst xmlns:a="http://schemas.openxmlformats.org/drawingml/2006/main">
               <a:ext uri="{FF2B5EF4-FFF2-40B4-BE49-F238E27FC236}">
-                <a16:creationId xmlns:a16="http://schemas.microsoft.com/office/drawing/2014/main" id="{7DB9736D-C195-4E83-BAF1-062B2C3D4260}"/>
+                <a16:creationId xmlns:a16="http://schemas.microsoft.com/office/drawing/2014/main" id="{CA85FBCB-7087-44F0-90DA-7B8096E96DD7}"/>
               </a:ext>
             </a:extLst>
           </p:cNvPr>
@@ -5133,7 +5133,7 @@
               </a:defRPr>
             </a:pPr>
             <a:r>
-              <a:t>Enterprise/OEM 조건 확정</a:t>
+              <a:t>TechFlow 제품 기능으로 자체 구현</a:t>
             </a:r>
           </a:p>
         </p:txBody>
@@ -5143,7 +5143,7 @@
           <p:cNvPr id="19" name="">
             <a:extLst xmlns:a="http://schemas.openxmlformats.org/drawingml/2006/main">
               <a:ext uri="{FF2B5EF4-FFF2-40B4-BE49-F238E27FC236}">
-                <a16:creationId xmlns:a16="http://schemas.microsoft.com/office/drawing/2014/main" id="{C611B4F5-37CA-4005-9313-6C2516E81292}"/>
+                <a16:creationId xmlns:a16="http://schemas.microsoft.com/office/drawing/2014/main" id="{A8A26FF0-631A-4632-9B98-9EF52ACF6A58}"/>
               </a:ext>
             </a:extLst>
           </p:cNvPr>
@@ -5163,7 +5163,7 @@
             </a:avLst>
           </a:prstGeom>
           <a:solidFill xmlns:a="http://schemas.openxmlformats.org/drawingml/2006/main">
-            <a:srgbClr val="FCE8E6"/>
+            <a:srgbClr val="E8F5ED"/>
           </a:solidFill>
         </p:spPr>
       </p:sp>
@@ -5172,7 +5172,7 @@
           <p:cNvPr id="20" name="">
             <a:extLst xmlns:a="http://schemas.openxmlformats.org/drawingml/2006/main">
               <a:ext uri="{FF2B5EF4-FFF2-40B4-BE49-F238E27FC236}">
-                <a16:creationId xmlns:a16="http://schemas.microsoft.com/office/drawing/2014/main" id="{3FABFA00-F638-4701-8174-FE42DCC9EB33}"/>
+                <a16:creationId xmlns:a16="http://schemas.microsoft.com/office/drawing/2014/main" id="{C839721A-2506-49B0-9ECF-7FFAC4AF87A8}"/>
               </a:ext>
             </a:extLst>
           </p:cNvPr>
@@ -5199,7 +5199,7 @@
             <a:pPr algn="l">
               <a:defRPr sz="2850">
                 <a:solidFill>
-                  <a:srgbClr val="A52714"/>
+                  <a:srgbClr val="177245"/>
                 </a:solidFill>
                 <a:latin typeface="Malgun Gothic"/>
                 <a:ea typeface="Malgun Gothic"/>
@@ -5217,7 +5217,7 @@
           <p:cNvPr id="21" name="">
             <a:extLst xmlns:a="http://schemas.openxmlformats.org/drawingml/2006/main">
               <a:ext uri="{FF2B5EF4-FFF2-40B4-BE49-F238E27FC236}">
-                <a16:creationId xmlns:a16="http://schemas.microsoft.com/office/drawing/2014/main" id="{C28E1E76-49E7-460E-8476-FE1FD7FD73D1}"/>
+                <a16:creationId xmlns:a16="http://schemas.microsoft.com/office/drawing/2014/main" id="{F9671A61-A324-4E03-B4E6-3E65FE987BD8}"/>
               </a:ext>
             </a:extLst>
           </p:cNvPr>
@@ -5252,7 +5252,7 @@
               </a:defRPr>
             </a:pPr>
             <a:r>
-              <a:t>Builder 임베딩</a:t>
+              <a:t>TechFlow Builder</a:t>
             </a:r>
           </a:p>
         </p:txBody>
@@ -5262,7 +5262,7 @@
           <p:cNvPr id="22" name="">
             <a:extLst xmlns:a="http://schemas.openxmlformats.org/drawingml/2006/main">
               <a:ext uri="{FF2B5EF4-FFF2-40B4-BE49-F238E27FC236}">
-                <a16:creationId xmlns:a16="http://schemas.microsoft.com/office/drawing/2014/main" id="{8B22527C-6B66-4714-B68A-1EB8E7F0786F}"/>
+                <a16:creationId xmlns:a16="http://schemas.microsoft.com/office/drawing/2014/main" id="{3B3263D7-2E15-4E36-9D67-3BBB3E1F539C}"/>
               </a:ext>
             </a:extLst>
           </p:cNvPr>
@@ -5289,15 +5289,15 @@
             <a:pPr algn="r">
               <a:defRPr sz="1350">
                 <a:solidFill>
-                  <a:srgbClr val="A52714"/>
-                </a:solidFill>
-                <a:latin typeface="Malgun Gothic"/>
-                <a:ea typeface="Malgun Gothic"/>
-                <a:cs typeface="Malgun Gothic"/>
-              </a:defRPr>
-            </a:pPr>
-            <a:r>
-              <a:t>계약 필요</a:t>
+                  <a:srgbClr val="177245"/>
+                </a:solidFill>
+                <a:latin typeface="Malgun Gothic"/>
+                <a:ea typeface="Malgun Gothic"/>
+                <a:cs typeface="Malgun Gothic"/>
+              </a:defRPr>
+            </a:pPr>
+            <a:r>
+              <a:t>자체 구현</a:t>
             </a:r>
           </a:p>
         </p:txBody>
@@ -5307,7 +5307,7 @@
           <p:cNvPr id="23" name="">
             <a:extLst xmlns:a="http://schemas.openxmlformats.org/drawingml/2006/main">
               <a:ext uri="{FF2B5EF4-FFF2-40B4-BE49-F238E27FC236}">
-                <a16:creationId xmlns:a16="http://schemas.microsoft.com/office/drawing/2014/main" id="{8B626744-325D-488A-BCE7-6C70607CF0DE}"/>
+                <a16:creationId xmlns:a16="http://schemas.microsoft.com/office/drawing/2014/main" id="{0613BD74-3239-4178-BE7E-65C3FC3E2DC0}"/>
               </a:ext>
             </a:extLst>
           </p:cNvPr>
@@ -5342,7 +5342,7 @@
               </a:defRPr>
             </a:pPr>
             <a:r>
-              <a:t>Enterprise/OEM 조건 확정</a:t>
+              <a:t>TechFlow 제품 기능으로 자체 구현</a:t>
             </a:r>
           </a:p>
         </p:txBody>
@@ -5352,7 +5352,7 @@
           <p:cNvPr id="24" name="">
             <a:extLst xmlns:a="http://schemas.openxmlformats.org/drawingml/2006/main">
               <a:ext uri="{FF2B5EF4-FFF2-40B4-BE49-F238E27FC236}">
-                <a16:creationId xmlns:a16="http://schemas.microsoft.com/office/drawing/2014/main" id="{C99864CD-92EA-4B93-88F3-CE0B9CE62AC9}"/>
+                <a16:creationId xmlns:a16="http://schemas.microsoft.com/office/drawing/2014/main" id="{C10B9494-4048-41F4-BD88-733168E3E50E}"/>
               </a:ext>
             </a:extLst>
           </p:cNvPr>
@@ -5372,7 +5372,7 @@
             </a:avLst>
           </a:prstGeom>
           <a:solidFill xmlns:a="http://schemas.openxmlformats.org/drawingml/2006/main">
-            <a:srgbClr val="FCE8E6"/>
+            <a:srgbClr val="E8F5ED"/>
           </a:solidFill>
         </p:spPr>
       </p:sp>
@@ -5381,7 +5381,7 @@
           <p:cNvPr id="25" name="">
             <a:extLst xmlns:a="http://schemas.openxmlformats.org/drawingml/2006/main">
               <a:ext uri="{FF2B5EF4-FFF2-40B4-BE49-F238E27FC236}">
-                <a16:creationId xmlns:a16="http://schemas.microsoft.com/office/drawing/2014/main" id="{6EBF373C-40BB-440E-B8D8-94309B7BF4A7}"/>
+                <a16:creationId xmlns:a16="http://schemas.microsoft.com/office/drawing/2014/main" id="{5E350F23-693D-49D4-AC62-07D2BE0A9B87}"/>
               </a:ext>
             </a:extLst>
           </p:cNvPr>
@@ -5408,7 +5408,7 @@
             <a:pPr algn="l">
               <a:defRPr sz="2850">
                 <a:solidFill>
-                  <a:srgbClr val="A52714"/>
+                  <a:srgbClr val="177245"/>
                 </a:solidFill>
                 <a:latin typeface="Malgun Gothic"/>
                 <a:ea typeface="Malgun Gothic"/>
@@ -5426,7 +5426,7 @@
           <p:cNvPr id="26" name="">
             <a:extLst xmlns:a="http://schemas.openxmlformats.org/drawingml/2006/main">
               <a:ext uri="{FF2B5EF4-FFF2-40B4-BE49-F238E27FC236}">
-                <a16:creationId xmlns:a16="http://schemas.microsoft.com/office/drawing/2014/main" id="{6A63126E-96E6-4ECD-854B-DA1F3EE2385A}"/>
+                <a16:creationId xmlns:a16="http://schemas.microsoft.com/office/drawing/2014/main" id="{5B4BEED3-5EB1-4A82-89ED-46F266C8F139}"/>
               </a:ext>
             </a:extLst>
           </p:cNvPr>
@@ -5461,7 +5461,7 @@
               </a:defRPr>
             </a:pPr>
             <a:r>
-              <a:t>Managed SaaS</a:t>
+              <a:t>다중 고객 플랫폼</a:t>
             </a:r>
           </a:p>
         </p:txBody>
@@ -5471,7 +5471,7 @@
           <p:cNvPr id="27" name="">
             <a:extLst xmlns:a="http://schemas.openxmlformats.org/drawingml/2006/main">
               <a:ext uri="{FF2B5EF4-FFF2-40B4-BE49-F238E27FC236}">
-                <a16:creationId xmlns:a16="http://schemas.microsoft.com/office/drawing/2014/main" id="{9B5FD2ED-8EA5-4B3A-BBB3-22F618A7A73F}"/>
+                <a16:creationId xmlns:a16="http://schemas.microsoft.com/office/drawing/2014/main" id="{72B73802-9A68-40D9-AC88-9DF3EBA211BC}"/>
               </a:ext>
             </a:extLst>
           </p:cNvPr>
@@ -5498,15 +5498,15 @@
             <a:pPr algn="r">
               <a:defRPr sz="1350">
                 <a:solidFill>
-                  <a:srgbClr val="A52714"/>
-                </a:solidFill>
-                <a:latin typeface="Malgun Gothic"/>
-                <a:ea typeface="Malgun Gothic"/>
-                <a:cs typeface="Malgun Gothic"/>
-              </a:defRPr>
-            </a:pPr>
-            <a:r>
-              <a:t>계약 필요</a:t>
+                  <a:srgbClr val="177245"/>
+                </a:solidFill>
+                <a:latin typeface="Malgun Gothic"/>
+                <a:ea typeface="Malgun Gothic"/>
+                <a:cs typeface="Malgun Gothic"/>
+              </a:defRPr>
+            </a:pPr>
+            <a:r>
+              <a:t>자체 구현</a:t>
             </a:r>
           </a:p>
         </p:txBody>
@@ -5516,7 +5516,7 @@
           <p:cNvPr id="28" name="">
             <a:extLst xmlns:a="http://schemas.openxmlformats.org/drawingml/2006/main">
               <a:ext uri="{FF2B5EF4-FFF2-40B4-BE49-F238E27FC236}">
-                <a16:creationId xmlns:a16="http://schemas.microsoft.com/office/drawing/2014/main" id="{DC71A6E1-77A4-4AD5-AFCF-266257707990}"/>
+                <a16:creationId xmlns:a16="http://schemas.microsoft.com/office/drawing/2014/main" id="{6984701E-DDC2-4FA9-88BE-B4F02663A543}"/>
               </a:ext>
             </a:extLst>
           </p:cNvPr>
@@ -5551,7 +5551,7 @@
               </a:defRPr>
             </a:pPr>
             <a:r>
-              <a:t>Enterprise/OEM 조건 확정</a:t>
+              <a:t>TechFlow 제품 기능으로 자체 구현</a:t>
             </a:r>
           </a:p>
         </p:txBody>
@@ -5561,7 +5561,7 @@
           <p:cNvPr id="29" name="">
             <a:extLst xmlns:a="http://schemas.openxmlformats.org/drawingml/2006/main">
               <a:ext uri="{FF2B5EF4-FFF2-40B4-BE49-F238E27FC236}">
-                <a16:creationId xmlns:a16="http://schemas.microsoft.com/office/drawing/2014/main" id="{DEE2C209-920D-41CB-8AFF-64126A1E50EC}"/>
+                <a16:creationId xmlns:a16="http://schemas.microsoft.com/office/drawing/2014/main" id="{B34E5CE8-458E-43EF-9496-8BBEFA15EE5E}"/>
               </a:ext>
             </a:extLst>
           </p:cNvPr>
@@ -5581,7 +5581,7 @@
             </a:avLst>
           </a:prstGeom>
           <a:solidFill xmlns:a="http://schemas.openxmlformats.org/drawingml/2006/main">
-            <a:srgbClr val="FFF4D6"/>
+            <a:srgbClr val="E8F5ED"/>
           </a:solidFill>
         </p:spPr>
       </p:sp>
@@ -5590,7 +5590,7 @@
           <p:cNvPr id="30" name="">
             <a:extLst xmlns:a="http://schemas.openxmlformats.org/drawingml/2006/main">
               <a:ext uri="{FF2B5EF4-FFF2-40B4-BE49-F238E27FC236}">
-                <a16:creationId xmlns:a16="http://schemas.microsoft.com/office/drawing/2014/main" id="{697407AF-B6AA-4610-BB16-35189773D5DE}"/>
+                <a16:creationId xmlns:a16="http://schemas.microsoft.com/office/drawing/2014/main" id="{250CF8EB-742B-4543-9133-C7A746A8E128}"/>
               </a:ext>
             </a:extLst>
           </p:cNvPr>
@@ -5617,7 +5617,7 @@
             <a:pPr algn="l">
               <a:defRPr sz="2850">
                 <a:solidFill>
-                  <a:srgbClr val="8A5A00"/>
+                  <a:srgbClr val="177245"/>
                 </a:solidFill>
                 <a:latin typeface="Malgun Gothic"/>
                 <a:ea typeface="Malgun Gothic"/>
@@ -5635,7 +5635,7 @@
           <p:cNvPr id="31" name="">
             <a:extLst xmlns:a="http://schemas.openxmlformats.org/drawingml/2006/main">
               <a:ext uri="{FF2B5EF4-FFF2-40B4-BE49-F238E27FC236}">
-                <a16:creationId xmlns:a16="http://schemas.microsoft.com/office/drawing/2014/main" id="{BD0D9726-A80F-4B3F-8CF5-46F11B960E60}"/>
+                <a16:creationId xmlns:a16="http://schemas.microsoft.com/office/drawing/2014/main" id="{481245E4-F803-4DEF-9F07-509E11849302}"/>
               </a:ext>
             </a:extLst>
           </p:cNvPr>
@@ -5670,7 +5670,7 @@
               </a:defRPr>
             </a:pPr>
             <a:r>
-              <a:t>오프라인 배포</a:t>
+              <a:t>오프라인 배포 기능</a:t>
             </a:r>
           </a:p>
         </p:txBody>
@@ -5680,7 +5680,7 @@
           <p:cNvPr id="32" name="">
             <a:extLst xmlns:a="http://schemas.openxmlformats.org/drawingml/2006/main">
               <a:ext uri="{FF2B5EF4-FFF2-40B4-BE49-F238E27FC236}">
-                <a16:creationId xmlns:a16="http://schemas.microsoft.com/office/drawing/2014/main" id="{B41766E4-7AC3-4DF0-8E49-1D249FE5C40B}"/>
+                <a16:creationId xmlns:a16="http://schemas.microsoft.com/office/drawing/2014/main" id="{2CC30563-09C0-48AA-8B63-2A539C373F0C}"/>
               </a:ext>
             </a:extLst>
           </p:cNvPr>
@@ -5707,15 +5707,15 @@
             <a:pPr algn="r">
               <a:defRPr sz="1350">
                 <a:solidFill>
-                  <a:srgbClr val="8A5A00"/>
-                </a:solidFill>
-                <a:latin typeface="Malgun Gothic"/>
-                <a:ea typeface="Malgun Gothic"/>
-                <a:cs typeface="Malgun Gothic"/>
-              </a:defRPr>
-            </a:pPr>
-            <a:r>
-              <a:t>조건부</a:t>
+                  <a:srgbClr val="177245"/>
+                </a:solidFill>
+                <a:latin typeface="Malgun Gothic"/>
+                <a:ea typeface="Malgun Gothic"/>
+                <a:cs typeface="Malgun Gothic"/>
+              </a:defRPr>
+            </a:pPr>
+            <a:r>
+              <a:t>자체 구현</a:t>
             </a:r>
           </a:p>
         </p:txBody>
@@ -5725,7 +5725,7 @@
           <p:cNvPr id="33" name="">
             <a:extLst xmlns:a="http://schemas.openxmlformats.org/drawingml/2006/main">
               <a:ext uri="{FF2B5EF4-FFF2-40B4-BE49-F238E27FC236}">
-                <a16:creationId xmlns:a16="http://schemas.microsoft.com/office/drawing/2014/main" id="{8478D1EF-BAC6-4CFE-88DE-C6B1932A1A12}"/>
+                <a16:creationId xmlns:a16="http://schemas.microsoft.com/office/drawing/2014/main" id="{68F9512A-0BA0-4AD7-80F1-0C1155477ADD}"/>
               </a:ext>
             </a:extLst>
           </p:cNvPr>
@@ -5760,7 +5760,7 @@
               </a:defRPr>
             </a:pPr>
             <a:r>
-              <a:t>MIT-only·SBOM·상표 확인</a:t>
+              <a:t>설치·업그레이드·운영 기능 구현</a:t>
             </a:r>
           </a:p>
         </p:txBody>
@@ -5768,7 +5768,7 @@
     </p:spTree>
     <p:extLst>
       <p:ext uri="{BB962C8B-B14F-4D97-AF65-F5344CB8AC3E}">
-        <p14:creationId xmlns:p14="http://schemas.microsoft.com/office/powerpoint/2010/main" val="65194407"/>
+        <p14:creationId xmlns:p14="http://schemas.microsoft.com/office/powerpoint/2010/main" val="1366557882"/>
       </p:ext>
     </p:extLst>
   </p:cSld>
@@ -5792,7 +5792,7 @@
           <p:cNvPr id="25" name="">
             <a:extLst xmlns:a="http://schemas.openxmlformats.org/drawingml/2006/main">
               <a:ext uri="{FF2B5EF4-FFF2-40B4-BE49-F238E27FC236}">
-                <a16:creationId xmlns:a16="http://schemas.microsoft.com/office/drawing/2014/main" id="{DDC3974C-4B5E-4751-A26B-F84E80DD25EA}"/>
+                <a16:creationId xmlns:a16="http://schemas.microsoft.com/office/drawing/2014/main" id="{5C0D67D5-DF5D-4C54-A9DB-DB36EC76342B}"/>
               </a:ext>
             </a:extLst>
           </p:cNvPr>
@@ -5837,7 +5837,7 @@
           <p:cNvPr id="2" name="">
             <a:extLst xmlns:a="http://schemas.openxmlformats.org/drawingml/2006/main">
               <a:ext uri="{FF2B5EF4-FFF2-40B4-BE49-F238E27FC236}">
-                <a16:creationId xmlns:a16="http://schemas.microsoft.com/office/drawing/2014/main" id="{1E132CF5-D0B9-44C5-8913-BE3780C03466}"/>
+                <a16:creationId xmlns:a16="http://schemas.microsoft.com/office/drawing/2014/main" id="{3466BC46-26B6-46EB-900E-B07A85783514}"/>
               </a:ext>
             </a:extLst>
           </p:cNvPr>
@@ -5882,7 +5882,7 @@
           <p:cNvPr id="3" name="">
             <a:extLst xmlns:a="http://schemas.openxmlformats.org/drawingml/2006/main">
               <a:ext uri="{FF2B5EF4-FFF2-40B4-BE49-F238E27FC236}">
-                <a16:creationId xmlns:a16="http://schemas.microsoft.com/office/drawing/2014/main" id="{7F097F1E-2F2D-44C1-B28E-2026F2C94B9C}"/>
+                <a16:creationId xmlns:a16="http://schemas.microsoft.com/office/drawing/2014/main" id="{7318F9CA-F2A9-4C4B-8C43-E307E88A1B79}"/>
               </a:ext>
             </a:extLst>
           </p:cNvPr>
@@ -5927,7 +5927,7 @@
           <p:cNvPr id="4" name="">
             <a:extLst xmlns:a="http://schemas.openxmlformats.org/drawingml/2006/main">
               <a:ext uri="{FF2B5EF4-FFF2-40B4-BE49-F238E27FC236}">
-                <a16:creationId xmlns:a16="http://schemas.microsoft.com/office/drawing/2014/main" id="{D0C363AC-AE92-4185-8408-0BDAE7392600}"/>
+                <a16:creationId xmlns:a16="http://schemas.microsoft.com/office/drawing/2014/main" id="{A1012F46-6B83-4CA2-B65A-C42B676D8703}"/>
               </a:ext>
             </a:extLst>
           </p:cNvPr>
@@ -5954,7 +5954,7 @@
           <p:cNvPr id="5" name="">
             <a:extLst xmlns:a="http://schemas.openxmlformats.org/drawingml/2006/main">
               <a:ext uri="{FF2B5EF4-FFF2-40B4-BE49-F238E27FC236}">
-                <a16:creationId xmlns:a16="http://schemas.microsoft.com/office/drawing/2014/main" id="{186DC927-E4C3-44A2-AEA8-E4EAE0402C71}"/>
+                <a16:creationId xmlns:a16="http://schemas.microsoft.com/office/drawing/2014/main" id="{D0E92168-0D3E-4A4A-81C6-50F01DEE8A3C}"/>
               </a:ext>
             </a:extLst>
           </p:cNvPr>
@@ -5981,7 +5981,7 @@
           <p:cNvPr id="6" name="">
             <a:extLst xmlns:a="http://schemas.openxmlformats.org/drawingml/2006/main">
               <a:ext uri="{FF2B5EF4-FFF2-40B4-BE49-F238E27FC236}">
-                <a16:creationId xmlns:a16="http://schemas.microsoft.com/office/drawing/2014/main" id="{2DDC93FB-AA2B-44A3-8408-E9C1789C7192}"/>
+                <a16:creationId xmlns:a16="http://schemas.microsoft.com/office/drawing/2014/main" id="{DAC7AFE3-78E6-4F1B-909C-60B967DBF93E}"/>
               </a:ext>
             </a:extLst>
           </p:cNvPr>
@@ -6008,7 +6008,7 @@
           <p:cNvPr id="7" name="">
             <a:extLst xmlns:a="http://schemas.openxmlformats.org/drawingml/2006/main">
               <a:ext uri="{FF2B5EF4-FFF2-40B4-BE49-F238E27FC236}">
-                <a16:creationId xmlns:a16="http://schemas.microsoft.com/office/drawing/2014/main" id="{D375CB48-399F-4B50-A474-45B3B3F1F78D}"/>
+                <a16:creationId xmlns:a16="http://schemas.microsoft.com/office/drawing/2014/main" id="{9FC03CC4-EB2E-4AD5-84F6-5B0BD7C8A1C0}"/>
               </a:ext>
             </a:extLst>
           </p:cNvPr>
@@ -6035,7 +6035,7 @@
           <p:cNvPr id="8" name="">
             <a:extLst xmlns:a="http://schemas.openxmlformats.org/drawingml/2006/main">
               <a:ext uri="{FF2B5EF4-FFF2-40B4-BE49-F238E27FC236}">
-                <a16:creationId xmlns:a16="http://schemas.microsoft.com/office/drawing/2014/main" id="{C1A72C9A-53E3-4E44-B4D3-4D3EAADF7D46}"/>
+                <a16:creationId xmlns:a16="http://schemas.microsoft.com/office/drawing/2014/main" id="{E718513D-1A21-4D46-AC8A-E06DF14048FF}"/>
               </a:ext>
             </a:extLst>
           </p:cNvPr>
@@ -6064,7 +6064,7 @@
           <p:cNvPr id="9" name="">
             <a:extLst xmlns:a="http://schemas.openxmlformats.org/drawingml/2006/main">
               <a:ext uri="{FF2B5EF4-FFF2-40B4-BE49-F238E27FC236}">
-                <a16:creationId xmlns:a16="http://schemas.microsoft.com/office/drawing/2014/main" id="{E19DE9D8-4AA6-4886-887E-4AD1108B912F}"/>
+                <a16:creationId xmlns:a16="http://schemas.microsoft.com/office/drawing/2014/main" id="{A4819D05-A8AE-41A2-BA6B-24EF7267FB74}"/>
               </a:ext>
             </a:extLst>
           </p:cNvPr>
@@ -6109,7 +6109,7 @@
           <p:cNvPr id="10" name="">
             <a:extLst xmlns:a="http://schemas.openxmlformats.org/drawingml/2006/main">
               <a:ext uri="{FF2B5EF4-FFF2-40B4-BE49-F238E27FC236}">
-                <a16:creationId xmlns:a16="http://schemas.microsoft.com/office/drawing/2014/main" id="{498ADD8A-176F-4A4F-B0F4-E03752374EEE}"/>
+                <a16:creationId xmlns:a16="http://schemas.microsoft.com/office/drawing/2014/main" id="{86A40DCE-952F-4D36-9539-9A4CFDCC995F}"/>
               </a:ext>
             </a:extLst>
           </p:cNvPr>
@@ -6156,7 +6156,7 @@
           <p:cNvPr id="11" name="">
             <a:extLst xmlns:a="http://schemas.openxmlformats.org/drawingml/2006/main">
               <a:ext uri="{FF2B5EF4-FFF2-40B4-BE49-F238E27FC236}">
-                <a16:creationId xmlns:a16="http://schemas.microsoft.com/office/drawing/2014/main" id="{E0411D91-80D8-4FA6-A32D-65F0ADAB8C9F}"/>
+                <a16:creationId xmlns:a16="http://schemas.microsoft.com/office/drawing/2014/main" id="{A473FE3F-964B-47BF-BAF0-BD919A1E32DD}"/>
               </a:ext>
             </a:extLst>
           </p:cNvPr>
@@ -6185,7 +6185,7 @@
           <p:cNvPr id="12" name="">
             <a:extLst xmlns:a="http://schemas.openxmlformats.org/drawingml/2006/main">
               <a:ext uri="{FF2B5EF4-FFF2-40B4-BE49-F238E27FC236}">
-                <a16:creationId xmlns:a16="http://schemas.microsoft.com/office/drawing/2014/main" id="{8D590C64-BD33-4BAC-A752-9DB79B1B0EAD}"/>
+                <a16:creationId xmlns:a16="http://schemas.microsoft.com/office/drawing/2014/main" id="{7C732925-205D-4C6B-B9F4-C056E9FD8ACF}"/>
               </a:ext>
             </a:extLst>
           </p:cNvPr>
@@ -6230,7 +6230,7 @@
           <p:cNvPr id="13" name="">
             <a:extLst xmlns:a="http://schemas.openxmlformats.org/drawingml/2006/main">
               <a:ext uri="{FF2B5EF4-FFF2-40B4-BE49-F238E27FC236}">
-                <a16:creationId xmlns:a16="http://schemas.microsoft.com/office/drawing/2014/main" id="{35AEBBB9-F281-4607-8B7C-1356768F93F0}"/>
+                <a16:creationId xmlns:a16="http://schemas.microsoft.com/office/drawing/2014/main" id="{A96C72E7-69D4-4461-BB9C-F3F731213C57}"/>
               </a:ext>
             </a:extLst>
           </p:cNvPr>
@@ -6277,7 +6277,7 @@
           <p:cNvPr id="14" name="">
             <a:extLst xmlns:a="http://schemas.openxmlformats.org/drawingml/2006/main">
               <a:ext uri="{FF2B5EF4-FFF2-40B4-BE49-F238E27FC236}">
-                <a16:creationId xmlns:a16="http://schemas.microsoft.com/office/drawing/2014/main" id="{983A5BFD-C677-44BB-9D47-00B5AF059D7F}"/>
+                <a16:creationId xmlns:a16="http://schemas.microsoft.com/office/drawing/2014/main" id="{E81A758D-F54E-4582-B39B-C63D8A19E01F}"/>
               </a:ext>
             </a:extLst>
           </p:cNvPr>
@@ -6306,7 +6306,7 @@
           <p:cNvPr id="15" name="">
             <a:extLst xmlns:a="http://schemas.openxmlformats.org/drawingml/2006/main">
               <a:ext uri="{FF2B5EF4-FFF2-40B4-BE49-F238E27FC236}">
-                <a16:creationId xmlns:a16="http://schemas.microsoft.com/office/drawing/2014/main" id="{DC380583-E7A6-4251-99AE-B6B86B9E8620}"/>
+                <a16:creationId xmlns:a16="http://schemas.microsoft.com/office/drawing/2014/main" id="{914CE148-F724-41B0-B2C8-13F09CFB5F26}"/>
               </a:ext>
             </a:extLst>
           </p:cNvPr>
@@ -6351,7 +6351,7 @@
           <p:cNvPr id="16" name="">
             <a:extLst xmlns:a="http://schemas.openxmlformats.org/drawingml/2006/main">
               <a:ext uri="{FF2B5EF4-FFF2-40B4-BE49-F238E27FC236}">
-                <a16:creationId xmlns:a16="http://schemas.microsoft.com/office/drawing/2014/main" id="{EDA5D6F1-B491-4A13-AC27-3C2F829F2775}"/>
+                <a16:creationId xmlns:a16="http://schemas.microsoft.com/office/drawing/2014/main" id="{2D419741-F93E-4D62-96B5-5E2622ACBA4C}"/>
               </a:ext>
             </a:extLst>
           </p:cNvPr>
@@ -6397,7 +6397,7 @@
           <p:cNvPr id="17" name="">
             <a:extLst xmlns:a="http://schemas.openxmlformats.org/drawingml/2006/main">
               <a:ext uri="{FF2B5EF4-FFF2-40B4-BE49-F238E27FC236}">
-                <a16:creationId xmlns:a16="http://schemas.microsoft.com/office/drawing/2014/main" id="{A5B5B062-BF02-4876-B11D-DE913CDEE67A}"/>
+                <a16:creationId xmlns:a16="http://schemas.microsoft.com/office/drawing/2014/main" id="{5562E193-A908-4283-979F-BE84CCE9EEBC}"/>
               </a:ext>
             </a:extLst>
           </p:cNvPr>
@@ -6426,7 +6426,7 @@
           <p:cNvPr id="18" name="">
             <a:extLst xmlns:a="http://schemas.openxmlformats.org/drawingml/2006/main">
               <a:ext uri="{FF2B5EF4-FFF2-40B4-BE49-F238E27FC236}">
-                <a16:creationId xmlns:a16="http://schemas.microsoft.com/office/drawing/2014/main" id="{8A7B25A1-8AF3-4D91-BA55-930C1175EC46}"/>
+                <a16:creationId xmlns:a16="http://schemas.microsoft.com/office/drawing/2014/main" id="{4873DF87-4D18-4EED-8126-34A160E390F7}"/>
               </a:ext>
             </a:extLst>
           </p:cNvPr>
@@ -6471,7 +6471,7 @@
           <p:cNvPr id="19" name="">
             <a:extLst xmlns:a="http://schemas.openxmlformats.org/drawingml/2006/main">
               <a:ext uri="{FF2B5EF4-FFF2-40B4-BE49-F238E27FC236}">
-                <a16:creationId xmlns:a16="http://schemas.microsoft.com/office/drawing/2014/main" id="{CC7DD9F8-0E02-4D09-8533-6F1BE9349844}"/>
+                <a16:creationId xmlns:a16="http://schemas.microsoft.com/office/drawing/2014/main" id="{891B645D-6E3D-4960-AD8F-0FA3ABBF6212}"/>
               </a:ext>
             </a:extLst>
           </p:cNvPr>
@@ -6517,7 +6517,7 @@
           <p:cNvPr id="20" name="">
             <a:extLst xmlns:a="http://schemas.openxmlformats.org/drawingml/2006/main">
               <a:ext uri="{FF2B5EF4-FFF2-40B4-BE49-F238E27FC236}">
-                <a16:creationId xmlns:a16="http://schemas.microsoft.com/office/drawing/2014/main" id="{199C8679-A223-476B-930B-A9AED9D95EAE}"/>
+                <a16:creationId xmlns:a16="http://schemas.microsoft.com/office/drawing/2014/main" id="{127C9691-B7B3-41CD-93B5-D1F19F4220E6}"/>
               </a:ext>
             </a:extLst>
           </p:cNvPr>
@@ -6546,7 +6546,7 @@
           <p:cNvPr id="21" name="">
             <a:extLst xmlns:a="http://schemas.openxmlformats.org/drawingml/2006/main">
               <a:ext uri="{FF2B5EF4-FFF2-40B4-BE49-F238E27FC236}">
-                <a16:creationId xmlns:a16="http://schemas.microsoft.com/office/drawing/2014/main" id="{083FB880-E1D0-4C30-BF62-53179531DA4A}"/>
+                <a16:creationId xmlns:a16="http://schemas.microsoft.com/office/drawing/2014/main" id="{3CCCBC8D-4988-4E14-91B7-D00BA373E487}"/>
               </a:ext>
             </a:extLst>
           </p:cNvPr>
@@ -6591,7 +6591,7 @@
           <p:cNvPr id="22" name="">
             <a:extLst xmlns:a="http://schemas.openxmlformats.org/drawingml/2006/main">
               <a:ext uri="{FF2B5EF4-FFF2-40B4-BE49-F238E27FC236}">
-                <a16:creationId xmlns:a16="http://schemas.microsoft.com/office/drawing/2014/main" id="{14AFD46F-25EB-4181-A17E-FF09BFDB034C}"/>
+                <a16:creationId xmlns:a16="http://schemas.microsoft.com/office/drawing/2014/main" id="{B51F2154-C9C2-4C9D-B6C4-E3C593E0A959}"/>
               </a:ext>
             </a:extLst>
           </p:cNvPr>
@@ -6636,7 +6636,7 @@
           <p:cNvPr id="23" name="">
             <a:extLst xmlns:a="http://schemas.openxmlformats.org/drawingml/2006/main">
               <a:ext uri="{FF2B5EF4-FFF2-40B4-BE49-F238E27FC236}">
-                <a16:creationId xmlns:a16="http://schemas.microsoft.com/office/drawing/2014/main" id="{DA5191E7-E869-4BB9-896A-FCA6843D9AFD}"/>
+                <a16:creationId xmlns:a16="http://schemas.microsoft.com/office/drawing/2014/main" id="{BD0A97FF-BCB4-4EBE-8899-AE06B3A19C5F}"/>
               </a:ext>
             </a:extLst>
           </p:cNvPr>
@@ -6681,7 +6681,7 @@
           <p:cNvPr id="24" name="">
             <a:extLst xmlns:a="http://schemas.openxmlformats.org/drawingml/2006/main">
               <a:ext uri="{FF2B5EF4-FFF2-40B4-BE49-F238E27FC236}">
-                <a16:creationId xmlns:a16="http://schemas.microsoft.com/office/drawing/2014/main" id="{1ACA64D3-4610-469A-81D6-A2911ADB93FE}"/>
+                <a16:creationId xmlns:a16="http://schemas.microsoft.com/office/drawing/2014/main" id="{CFD55353-EEE1-4B7C-AD47-E7D1FA6151FB}"/>
               </a:ext>
             </a:extLst>
           </p:cNvPr>
@@ -6724,7 +6724,7 @@
     </p:spTree>
     <p:extLst>
       <p:ext uri="{BB962C8B-B14F-4D97-AF65-F5344CB8AC3E}">
-        <p14:creationId xmlns:p14="http://schemas.microsoft.com/office/powerpoint/2010/main" val="341549529"/>
+        <p14:creationId xmlns:p14="http://schemas.microsoft.com/office/powerpoint/2010/main" val="1164911920"/>
       </p:ext>
     </p:extLst>
   </p:cSld>
@@ -6748,7 +6748,7 @@
           <p:cNvPr id="21" name="">
             <a:extLst xmlns:a="http://schemas.openxmlformats.org/drawingml/2006/main">
               <a:ext uri="{FF2B5EF4-FFF2-40B4-BE49-F238E27FC236}">
-                <a16:creationId xmlns:a16="http://schemas.microsoft.com/office/drawing/2014/main" id="{432477D2-7DAA-41C9-B722-769956FBFE39}"/>
+                <a16:creationId xmlns:a16="http://schemas.microsoft.com/office/drawing/2014/main" id="{BDA5577D-4871-4696-B5A7-EDECB6343533}"/>
               </a:ext>
             </a:extLst>
           </p:cNvPr>
@@ -6783,7 +6783,7 @@
               </a:defRPr>
             </a:pPr>
             <a:r>
-              <a:t>상용 게이트: 기능이 아니라 고객 접근 방식이 계약을 결정</a:t>
+              <a:t>구현 원칙: 라이선스와 공개 여부는 백로그 게이트가 아니다</a:t>
             </a:r>
           </a:p>
         </p:txBody>
@@ -6793,7 +6793,7 @@
           <p:cNvPr id="2" name="">
             <a:extLst xmlns:a="http://schemas.openxmlformats.org/drawingml/2006/main">
               <a:ext uri="{FF2B5EF4-FFF2-40B4-BE49-F238E27FC236}">
-                <a16:creationId xmlns:a16="http://schemas.microsoft.com/office/drawing/2014/main" id="{0DECDA8A-51F3-430C-B244-AF94D294A7B0}"/>
+                <a16:creationId xmlns:a16="http://schemas.microsoft.com/office/drawing/2014/main" id="{454F56C6-093F-49C2-B564-6EE7CF04F8E7}"/>
               </a:ext>
             </a:extLst>
           </p:cNvPr>
@@ -6838,7 +6838,7 @@
           <p:cNvPr id="3" name="">
             <a:extLst xmlns:a="http://schemas.openxmlformats.org/drawingml/2006/main">
               <a:ext uri="{FF2B5EF4-FFF2-40B4-BE49-F238E27FC236}">
-                <a16:creationId xmlns:a16="http://schemas.microsoft.com/office/drawing/2014/main" id="{C1FD0E0C-C4D3-4A3F-A51F-8974ABDE0C22}"/>
+                <a16:creationId xmlns:a16="http://schemas.microsoft.com/office/drawing/2014/main" id="{6B44C9D8-F2AC-4C28-A23A-0700C123BA0F}"/>
               </a:ext>
             </a:extLst>
           </p:cNvPr>
@@ -6867,7 +6867,7 @@
           <p:cNvPr id="4" name="">
             <a:extLst xmlns:a="http://schemas.openxmlformats.org/drawingml/2006/main">
               <a:ext uri="{FF2B5EF4-FFF2-40B4-BE49-F238E27FC236}">
-                <a16:creationId xmlns:a16="http://schemas.microsoft.com/office/drawing/2014/main" id="{610430BD-C9E0-4456-8F07-293419A578B7}"/>
+                <a16:creationId xmlns:a16="http://schemas.microsoft.com/office/drawing/2014/main" id="{A9A79AE6-143F-4E8F-9710-3340A55B0E4C}"/>
               </a:ext>
             </a:extLst>
           </p:cNvPr>
@@ -6902,7 +6902,7 @@
               </a:defRPr>
             </a:pPr>
             <a:r>
-              <a:t>G1</a:t>
+              <a:t>I1</a:t>
             </a:r>
           </a:p>
         </p:txBody>
@@ -6912,7 +6912,7 @@
           <p:cNvPr id="5" name="">
             <a:extLst xmlns:a="http://schemas.openxmlformats.org/drawingml/2006/main">
               <a:ext uri="{FF2B5EF4-FFF2-40B4-BE49-F238E27FC236}">
-                <a16:creationId xmlns:a16="http://schemas.microsoft.com/office/drawing/2014/main" id="{48540BE1-19D8-4568-9323-0AFADA44BFBB}"/>
+                <a16:creationId xmlns:a16="http://schemas.microsoft.com/office/drawing/2014/main" id="{F45CFC18-BB73-49B4-A082-9AEB8AA4F757}"/>
               </a:ext>
             </a:extLst>
           </p:cNvPr>
@@ -6947,7 +6947,7 @@
               </a:defRPr>
             </a:pPr>
             <a:r>
-              <a:t>사내 PoC</a:t>
+              <a:t>Community 기반</a:t>
             </a:r>
           </a:p>
         </p:txBody>
@@ -6957,7 +6957,7 @@
           <p:cNvPr id="6" name="">
             <a:extLst xmlns:a="http://schemas.openxmlformats.org/drawingml/2006/main">
               <a:ext uri="{FF2B5EF4-FFF2-40B4-BE49-F238E27FC236}">
-                <a16:creationId xmlns:a16="http://schemas.microsoft.com/office/drawing/2014/main" id="{F3B64B46-5DB9-4690-B8B1-0117D02BFCC3}"/>
+                <a16:creationId xmlns:a16="http://schemas.microsoft.com/office/drawing/2014/main" id="{6A8644BA-0268-4463-9DBD-29BFC2EAE0EB}"/>
               </a:ext>
             </a:extLst>
           </p:cNvPr>
@@ -6992,10 +6992,10 @@
               </a:defRPr>
             </a:pPr>
             <a:r>
-              <a:t>Community 기능만
-운영자 UI 격리
-고정 버전·보안 기준
-SBOM 초안</a:t>
+              <a:t>시각적 설계·실행 엔진
+Webhook · Queue · Worker
+Custom Piece 연동
+고정 버전·운영 품질</a:t>
             </a:r>
           </a:p>
         </p:txBody>
@@ -7005,7 +7005,7 @@
           <p:cNvPr id="7" name="">
             <a:extLst xmlns:a="http://schemas.openxmlformats.org/drawingml/2006/main">
               <a:ext uri="{FF2B5EF4-FFF2-40B4-BE49-F238E27FC236}">
-                <a16:creationId xmlns:a16="http://schemas.microsoft.com/office/drawing/2014/main" id="{34E207C5-6B46-497C-82BF-25551576903F}"/>
+                <a16:creationId xmlns:a16="http://schemas.microsoft.com/office/drawing/2014/main" id="{21861F2B-80F5-4EE2-B0BC-A308A247F556}"/>
               </a:ext>
             </a:extLst>
           </p:cNvPr>
@@ -7025,7 +7025,7 @@
             </a:avLst>
           </a:prstGeom>
           <a:solidFill xmlns:a="http://schemas.openxmlformats.org/drawingml/2006/main">
-            <a:srgbClr val="FFF4D6"/>
+            <a:srgbClr val="DDF3FF"/>
           </a:solidFill>
         </p:spPr>
       </p:sp>
@@ -7034,7 +7034,7 @@
           <p:cNvPr id="8" name="">
             <a:extLst xmlns:a="http://schemas.openxmlformats.org/drawingml/2006/main">
               <a:ext uri="{FF2B5EF4-FFF2-40B4-BE49-F238E27FC236}">
-                <a16:creationId xmlns:a16="http://schemas.microsoft.com/office/drawing/2014/main" id="{66F96D3A-6AD5-42A6-93C1-91ED6A6B79EF}"/>
+                <a16:creationId xmlns:a16="http://schemas.microsoft.com/office/drawing/2014/main" id="{F71D5A24-C4AA-4C57-9FB2-89D097534E93}"/>
               </a:ext>
             </a:extLst>
           </p:cNvPr>
@@ -7061,15 +7061,15 @@
             <a:pPr algn="l">
               <a:defRPr sz="3150">
                 <a:solidFill>
-                  <a:srgbClr val="8A5A00"/>
-                </a:solidFill>
-                <a:latin typeface="Malgun Gothic"/>
-                <a:ea typeface="Malgun Gothic"/>
-                <a:cs typeface="Malgun Gothic"/>
-              </a:defRPr>
-            </a:pPr>
-            <a:r>
-              <a:t>G2</a:t>
+                  <a:srgbClr val="3D8DFF"/>
+                </a:solidFill>
+                <a:latin typeface="Malgun Gothic"/>
+                <a:ea typeface="Malgun Gothic"/>
+                <a:cs typeface="Malgun Gothic"/>
+              </a:defRPr>
+            </a:pPr>
+            <a:r>
+              <a:t>I2</a:t>
             </a:r>
           </a:p>
         </p:txBody>
@@ -7079,7 +7079,7 @@
           <p:cNvPr id="9" name="">
             <a:extLst xmlns:a="http://schemas.openxmlformats.org/drawingml/2006/main">
               <a:ext uri="{FF2B5EF4-FFF2-40B4-BE49-F238E27FC236}">
-                <a16:creationId xmlns:a16="http://schemas.microsoft.com/office/drawing/2014/main" id="{D7E84B0B-F574-47F4-820C-417A7B58BFD7}"/>
+                <a16:creationId xmlns:a16="http://schemas.microsoft.com/office/drawing/2014/main" id="{92FC7E9A-A295-46DB-9B32-3004DB3DEE5A}"/>
               </a:ext>
             </a:extLst>
           </p:cNvPr>
@@ -7114,7 +7114,7 @@
               </a:defRPr>
             </a:pPr>
             <a:r>
-              <a:t>고객 파일럿</a:t>
+              <a:t>상위 기능 자체 구현</a:t>
             </a:r>
           </a:p>
         </p:txBody>
@@ -7124,7 +7124,7 @@
           <p:cNvPr id="10" name="">
             <a:extLst xmlns:a="http://schemas.openxmlformats.org/drawingml/2006/main">
               <a:ext uri="{FF2B5EF4-FFF2-40B4-BE49-F238E27FC236}">
-                <a16:creationId xmlns:a16="http://schemas.microsoft.com/office/drawing/2014/main" id="{FFA0EB84-9C46-44C0-8F5B-5E376C67EC1B}"/>
+                <a16:creationId xmlns:a16="http://schemas.microsoft.com/office/drawing/2014/main" id="{1A9AB8F9-B2B3-43C0-8FE6-9F026BBC4041}"/>
               </a:ext>
             </a:extLst>
           </p:cNvPr>
@@ -7159,10 +7159,10 @@
               </a:defRPr>
             </a:pPr>
             <a:r>
-              <a:t>배포 방식 서면 확인
-고객별 인스턴스
-NOTICE·SBOM
-백업·업그레이드</a:t>
+              <a:t>Builder · 제품 API
+SSO · RBAC · Audit
+Secret · Template · GitOps
+Worker 격리 · Analytics</a:t>
             </a:r>
           </a:p>
         </p:txBody>
@@ -7172,7 +7172,7 @@
           <p:cNvPr id="11" name="">
             <a:extLst xmlns:a="http://schemas.openxmlformats.org/drawingml/2006/main">
               <a:ext uri="{FF2B5EF4-FFF2-40B4-BE49-F238E27FC236}">
-                <a16:creationId xmlns:a16="http://schemas.microsoft.com/office/drawing/2014/main" id="{4B829B5E-2697-4862-89A6-2782CD22DA4D}"/>
+                <a16:creationId xmlns:a16="http://schemas.microsoft.com/office/drawing/2014/main" id="{584AA18A-00E2-4B4B-B8CF-B8BFC18ECCE6}"/>
               </a:ext>
             </a:extLst>
           </p:cNvPr>
@@ -7192,7 +7192,7 @@
             </a:avLst>
           </a:prstGeom>
           <a:solidFill xmlns:a="http://schemas.openxmlformats.org/drawingml/2006/main">
-            <a:srgbClr val="FCE8E6"/>
+            <a:srgbClr val="F2F2F2"/>
           </a:solidFill>
         </p:spPr>
       </p:sp>
@@ -7201,7 +7201,7 @@
           <p:cNvPr id="12" name="">
             <a:extLst xmlns:a="http://schemas.openxmlformats.org/drawingml/2006/main">
               <a:ext uri="{FF2B5EF4-FFF2-40B4-BE49-F238E27FC236}">
-                <a16:creationId xmlns:a16="http://schemas.microsoft.com/office/drawing/2014/main" id="{D06A3088-00B0-4BEA-BE14-C6EAB6766813}"/>
+                <a16:creationId xmlns:a16="http://schemas.microsoft.com/office/drawing/2014/main" id="{5E858CA2-9B0F-427E-B5FD-682A6BE5A306}"/>
               </a:ext>
             </a:extLst>
           </p:cNvPr>
@@ -7228,15 +7228,15 @@
             <a:pPr algn="l">
               <a:defRPr sz="3150">
                 <a:solidFill>
-                  <a:srgbClr val="A52714"/>
-                </a:solidFill>
-                <a:latin typeface="Malgun Gothic"/>
-                <a:ea typeface="Malgun Gothic"/>
-                <a:cs typeface="Malgun Gothic"/>
-              </a:defRPr>
-            </a:pPr>
-            <a:r>
-              <a:t>G3–G4</a:t>
+                  <a:srgbClr val="555555"/>
+                </a:solidFill>
+                <a:latin typeface="Malgun Gothic"/>
+                <a:ea typeface="Malgun Gothic"/>
+                <a:cs typeface="Malgun Gothic"/>
+              </a:defRPr>
+            </a:pPr>
+            <a:r>
+              <a:t>I3–I4</a:t>
             </a:r>
           </a:p>
         </p:txBody>
@@ -7246,7 +7246,7 @@
           <p:cNvPr id="13" name="">
             <a:extLst xmlns:a="http://schemas.openxmlformats.org/drawingml/2006/main">
               <a:ext uri="{FF2B5EF4-FFF2-40B4-BE49-F238E27FC236}">
-                <a16:creationId xmlns:a16="http://schemas.microsoft.com/office/drawing/2014/main" id="{790291A5-24F3-4F31-86AE-A6A52734FB9A}"/>
+                <a16:creationId xmlns:a16="http://schemas.microsoft.com/office/drawing/2014/main" id="{596474BB-B8C7-4D6A-8BE0-B7230279D84D}"/>
               </a:ext>
             </a:extLst>
           </p:cNvPr>
@@ -7281,7 +7281,7 @@
               </a:defRPr>
             </a:pPr>
             <a:r>
-              <a:t>직접 UI·GA</a:t>
+              <a:t>결정 책임 분리</a:t>
             </a:r>
           </a:p>
         </p:txBody>
@@ -7291,7 +7291,7 @@
           <p:cNvPr id="14" name="">
             <a:extLst xmlns:a="http://schemas.openxmlformats.org/drawingml/2006/main">
               <a:ext uri="{FF2B5EF4-FFF2-40B4-BE49-F238E27FC236}">
-                <a16:creationId xmlns:a16="http://schemas.microsoft.com/office/drawing/2014/main" id="{D4D2912C-85DE-4D50-9308-3ECF835F48BF}"/>
+                <a16:creationId xmlns:a16="http://schemas.microsoft.com/office/drawing/2014/main" id="{18CB629F-7E6E-4A4D-B61F-398D9C3FD8D6}"/>
               </a:ext>
             </a:extLst>
           </p:cNvPr>
@@ -7326,10 +7326,10 @@
               </a:defRPr>
             </a:pPr>
             <a:r>
-              <a:t>Enterprise/OEM 계약
-법무·상표·API 조건
-SLA·면책·보안 통지
-최종 이미지 스캔</a:t>
+              <a:t>제품 권한은 TechFlow
+자원 권한은 ABLESTACK API
+고객 공개·판매·배포는
+제품 책임자가 별도 결정</a:t>
             </a:r>
           </a:p>
         </p:txBody>
@@ -7339,7 +7339,7 @@
           <p:cNvPr id="15" name="">
             <a:extLst xmlns:a="http://schemas.openxmlformats.org/drawingml/2006/main">
               <a:ext uri="{FF2B5EF4-FFF2-40B4-BE49-F238E27FC236}">
-                <a16:creationId xmlns:a16="http://schemas.microsoft.com/office/drawing/2014/main" id="{493CE209-2464-4A57-8637-BA11D3641616}"/>
+                <a16:creationId xmlns:a16="http://schemas.microsoft.com/office/drawing/2014/main" id="{63E59655-61D1-4EA3-8B81-5F40AFFD7A9F}"/>
               </a:ext>
             </a:extLst>
           </p:cNvPr>
@@ -7374,7 +7374,7 @@
               </a:defRPr>
             </a:pPr>
             <a:r>
-              <a:t>현재 승인 범위</a:t>
+              <a:t>기본 실행 기반</a:t>
             </a:r>
           </a:p>
         </p:txBody>
@@ -7384,7 +7384,7 @@
           <p:cNvPr id="16" name="">
             <a:extLst xmlns:a="http://schemas.openxmlformats.org/drawingml/2006/main">
               <a:ext uri="{FF2B5EF4-FFF2-40B4-BE49-F238E27FC236}">
-                <a16:creationId xmlns:a16="http://schemas.microsoft.com/office/drawing/2014/main" id="{A121DB5B-4C87-4185-9C12-E33F883C5E15}"/>
+                <a16:creationId xmlns:a16="http://schemas.microsoft.com/office/drawing/2014/main" id="{6C2C028D-9995-416D-B962-6C8EA26FD2E1}"/>
               </a:ext>
             </a:extLst>
           </p:cNvPr>
@@ -7411,7 +7411,7 @@
           <p:cNvPr id="17" name="">
             <a:extLst xmlns:a="http://schemas.openxmlformats.org/drawingml/2006/main">
               <a:ext uri="{FF2B5EF4-FFF2-40B4-BE49-F238E27FC236}">
-                <a16:creationId xmlns:a16="http://schemas.microsoft.com/office/drawing/2014/main" id="{F184C8FB-903B-4869-A98C-B59B757EDFDC}"/>
+                <a16:creationId xmlns:a16="http://schemas.microsoft.com/office/drawing/2014/main" id="{A5D98CF5-BCA8-43A9-A419-ECF79BF032E4}"/>
               </a:ext>
             </a:extLst>
           </p:cNvPr>
@@ -7423,7 +7423,7 @@
         <p:spPr>
           <a:xfrm xmlns:a="http://schemas.openxmlformats.org/drawingml/2006/main">
             <a:off x="4333875" y="5581650"/>
-            <a:ext cx="1428750" cy="285750"/>
+            <a:ext cx="1619250" cy="285750"/>
           </a:xfrm>
           <a:prstGeom xmlns:a="http://schemas.openxmlformats.org/drawingml/2006/main" prst="rect">
             <a:avLst/>
@@ -7438,15 +7438,15 @@
             <a:pPr algn="l">
               <a:defRPr sz="1350">
                 <a:solidFill>
-                  <a:srgbClr val="8A5A00"/>
-                </a:solidFill>
-                <a:latin typeface="Malgun Gothic"/>
-                <a:ea typeface="Malgun Gothic"/>
-                <a:cs typeface="Malgun Gothic"/>
-              </a:defRPr>
-            </a:pPr>
-            <a:r>
-              <a:t>서면 확인 후</a:t>
+                  <a:srgbClr val="3D8DFF"/>
+                </a:solidFill>
+                <a:latin typeface="Malgun Gothic"/>
+                <a:ea typeface="Malgun Gothic"/>
+                <a:cs typeface="Malgun Gothic"/>
+              </a:defRPr>
+            </a:pPr>
+            <a:r>
+              <a:t>요구사항대로 구현</a:t>
             </a:r>
           </a:p>
         </p:txBody>
@@ -7456,25 +7456,25 @@
           <p:cNvPr id="18" name="">
             <a:extLst xmlns:a="http://schemas.openxmlformats.org/drawingml/2006/main">
               <a:ext uri="{FF2B5EF4-FFF2-40B4-BE49-F238E27FC236}">
-                <a16:creationId xmlns:a16="http://schemas.microsoft.com/office/drawing/2014/main" id="{3786E440-D058-4C78-B88E-12687B21B98F}"/>
-              </a:ext>
-            </a:extLst>
-          </p:cNvPr>
-          <p:cNvSpPr>
-            <a:spLocks xmlns:a="http://schemas.openxmlformats.org/drawingml/2006/main" noGrp="1"/>
-          </p:cNvSpPr>
-          <p:nvPr/>
-        </p:nvSpPr>
-        <p:spPr>
-          <a:xfrm xmlns:a="http://schemas.openxmlformats.org/drawingml/2006/main">
-            <a:off x="5848350" y="5724525"/>
-            <a:ext cx="2000250" cy="38100"/>
+                <a16:creationId xmlns:a16="http://schemas.microsoft.com/office/drawing/2014/main" id="{4BB1A584-C93B-495C-8D4C-8B065E4C8C76}"/>
+              </a:ext>
+            </a:extLst>
+          </p:cNvPr>
+          <p:cNvSpPr>
+            <a:spLocks xmlns:a="http://schemas.openxmlformats.org/drawingml/2006/main" noGrp="1"/>
+          </p:cNvSpPr>
+          <p:nvPr/>
+        </p:nvSpPr>
+        <p:spPr>
+          <a:xfrm xmlns:a="http://schemas.openxmlformats.org/drawingml/2006/main">
+            <a:off x="6038850" y="5724525"/>
+            <a:ext cx="1809750" cy="38100"/>
           </a:xfrm>
           <a:prstGeom xmlns:a="http://schemas.openxmlformats.org/drawingml/2006/main" prst="rect">
             <a:avLst/>
           </a:prstGeom>
           <a:solidFill xmlns:a="http://schemas.openxmlformats.org/drawingml/2006/main">
-            <a:srgbClr val="8A5A00"/>
+            <a:srgbClr val="3D8DFF"/>
           </a:solidFill>
         </p:spPr>
       </p:sp>
@@ -7483,7 +7483,7 @@
           <p:cNvPr id="19" name="">
             <a:extLst xmlns:a="http://schemas.openxmlformats.org/drawingml/2006/main">
               <a:ext uri="{FF2B5EF4-FFF2-40B4-BE49-F238E27FC236}">
-                <a16:creationId xmlns:a16="http://schemas.microsoft.com/office/drawing/2014/main" id="{CE3F3C88-84D2-445A-A15E-A99EFF81AD2B}"/>
+                <a16:creationId xmlns:a16="http://schemas.microsoft.com/office/drawing/2014/main" id="{846EEB15-B349-49DC-A48D-500CC11C8F1A}"/>
               </a:ext>
             </a:extLst>
           </p:cNvPr>
@@ -7495,7 +7495,7 @@
         <p:spPr>
           <a:xfrm xmlns:a="http://schemas.openxmlformats.org/drawingml/2006/main">
             <a:off x="8267700" y="5581650"/>
-            <a:ext cx="1428750" cy="285750"/>
+            <a:ext cx="1619250" cy="285750"/>
           </a:xfrm>
           <a:prstGeom xmlns:a="http://schemas.openxmlformats.org/drawingml/2006/main" prst="rect">
             <a:avLst/>
@@ -7510,15 +7510,15 @@
             <a:pPr algn="l">
               <a:defRPr sz="1350">
                 <a:solidFill>
-                  <a:srgbClr val="A52714"/>
-                </a:solidFill>
-                <a:latin typeface="Malgun Gothic"/>
-                <a:ea typeface="Malgun Gothic"/>
-                <a:cs typeface="Malgun Gothic"/>
-              </a:defRPr>
-            </a:pPr>
-            <a:r>
-              <a:t>계약·법무 후</a:t>
+                  <a:srgbClr val="555555"/>
+                </a:solidFill>
+                <a:latin typeface="Malgun Gothic"/>
+                <a:ea typeface="Malgun Gothic"/>
+                <a:cs typeface="Malgun Gothic"/>
+              </a:defRPr>
+            </a:pPr>
+            <a:r>
+              <a:t>공개 판단은 별도</a:t>
             </a:r>
           </a:p>
         </p:txBody>
@@ -7528,32 +7528,32 @@
           <p:cNvPr id="20" name="">
             <a:extLst xmlns:a="http://schemas.openxmlformats.org/drawingml/2006/main">
               <a:ext uri="{FF2B5EF4-FFF2-40B4-BE49-F238E27FC236}">
-                <a16:creationId xmlns:a16="http://schemas.microsoft.com/office/drawing/2014/main" id="{CAE81AE6-7B34-44DB-83B2-F73D46FDE919}"/>
-              </a:ext>
-            </a:extLst>
-          </p:cNvPr>
-          <p:cNvSpPr>
-            <a:spLocks xmlns:a="http://schemas.openxmlformats.org/drawingml/2006/main" noGrp="1"/>
-          </p:cNvSpPr>
-          <p:nvPr/>
-        </p:nvSpPr>
-        <p:spPr>
-          <a:xfrm xmlns:a="http://schemas.openxmlformats.org/drawingml/2006/main">
-            <a:off x="9782175" y="5724525"/>
-            <a:ext cx="2000250" cy="38100"/>
+                <a16:creationId xmlns:a16="http://schemas.microsoft.com/office/drawing/2014/main" id="{C01667F1-9C29-4871-9EE5-85A3BABC6185}"/>
+              </a:ext>
+            </a:extLst>
+          </p:cNvPr>
+          <p:cNvSpPr>
+            <a:spLocks xmlns:a="http://schemas.openxmlformats.org/drawingml/2006/main" noGrp="1"/>
+          </p:cNvSpPr>
+          <p:nvPr/>
+        </p:nvSpPr>
+        <p:spPr>
+          <a:xfrm xmlns:a="http://schemas.openxmlformats.org/drawingml/2006/main">
+            <a:off x="9972675" y="5724525"/>
+            <a:ext cx="1809750" cy="38100"/>
           </a:xfrm>
           <a:prstGeom xmlns:a="http://schemas.openxmlformats.org/drawingml/2006/main" prst="rect">
             <a:avLst/>
           </a:prstGeom>
           <a:solidFill xmlns:a="http://schemas.openxmlformats.org/drawingml/2006/main">
-            <a:srgbClr val="A52714"/>
+            <a:srgbClr val="555555"/>
           </a:solidFill>
         </p:spPr>
       </p:sp>
     </p:spTree>
     <p:extLst>
       <p:ext uri="{BB962C8B-B14F-4D97-AF65-F5344CB8AC3E}">
-        <p14:creationId xmlns:p14="http://schemas.microsoft.com/office/powerpoint/2010/main" val="622366564"/>
+        <p14:creationId xmlns:p14="http://schemas.microsoft.com/office/powerpoint/2010/main" val="563954026"/>
       </p:ext>
     </p:extLst>
   </p:cSld>
@@ -7577,7 +7577,7 @@
           <p:cNvPr id="15" name="">
             <a:extLst xmlns:a="http://schemas.openxmlformats.org/drawingml/2006/main">
               <a:ext uri="{FF2B5EF4-FFF2-40B4-BE49-F238E27FC236}">
-                <a16:creationId xmlns:a16="http://schemas.microsoft.com/office/drawing/2014/main" id="{359E41C7-9A23-45C9-BFC8-1A67DE89C629}"/>
+                <a16:creationId xmlns:a16="http://schemas.microsoft.com/office/drawing/2014/main" id="{B72D6A2B-2E40-40C0-A97B-AC9A82C163E3}"/>
               </a:ext>
             </a:extLst>
           </p:cNvPr>
@@ -7612,7 +7612,7 @@
               </a:defRPr>
             </a:pPr>
             <a:r>
-              <a:t>가장 큰 미확정 위험은 ‘기능’보다 배포 이미지</a:t>
+              <a:t>공개·배포 조건은 구현 제약이 아닌 참고정보</a:t>
             </a:r>
           </a:p>
         </p:txBody>
@@ -7622,7 +7622,7 @@
           <p:cNvPr id="2" name="">
             <a:extLst xmlns:a="http://schemas.openxmlformats.org/drawingml/2006/main">
               <a:ext uri="{FF2B5EF4-FFF2-40B4-BE49-F238E27FC236}">
-                <a16:creationId xmlns:a16="http://schemas.microsoft.com/office/drawing/2014/main" id="{905C9EFB-BA26-438A-91DD-1D4509E5441F}"/>
+                <a16:creationId xmlns:a16="http://schemas.microsoft.com/office/drawing/2014/main" id="{E8392829-1390-4AD6-9B9E-3C9A6EFF8EDC}"/>
               </a:ext>
             </a:extLst>
           </p:cNvPr>
@@ -7667,7 +7667,7 @@
           <p:cNvPr id="3" name="">
             <a:extLst xmlns:a="http://schemas.openxmlformats.org/drawingml/2006/main">
               <a:ext uri="{FF2B5EF4-FFF2-40B4-BE49-F238E27FC236}">
-                <a16:creationId xmlns:a16="http://schemas.microsoft.com/office/drawing/2014/main" id="{D8C0CF1E-2796-4910-B739-1AB3F297BD21}"/>
+                <a16:creationId xmlns:a16="http://schemas.microsoft.com/office/drawing/2014/main" id="{78CD6764-3020-460E-8152-052DB952C848}"/>
               </a:ext>
             </a:extLst>
           </p:cNvPr>
@@ -7712,7 +7712,7 @@
           <p:cNvPr id="4" name="">
             <a:extLst xmlns:a="http://schemas.openxmlformats.org/drawingml/2006/main">
               <a:ext uri="{FF2B5EF4-FFF2-40B4-BE49-F238E27FC236}">
-                <a16:creationId xmlns:a16="http://schemas.microsoft.com/office/drawing/2014/main" id="{CCBA384B-28CE-4FB6-99E2-5CD8B4915B74}"/>
+                <a16:creationId xmlns:a16="http://schemas.microsoft.com/office/drawing/2014/main" id="{563EA417-5A56-47F7-B679-B7F32882EFD7}"/>
               </a:ext>
             </a:extLst>
           </p:cNvPr>
@@ -7741,7 +7741,7 @@
           <p:cNvPr id="5" name="">
             <a:extLst xmlns:a="http://schemas.openxmlformats.org/drawingml/2006/main">
               <a:ext uri="{FF2B5EF4-FFF2-40B4-BE49-F238E27FC236}">
-                <a16:creationId xmlns:a16="http://schemas.microsoft.com/office/drawing/2014/main" id="{B16D66C8-9BDB-450B-AAA3-8C2C82F3C2B0}"/>
+                <a16:creationId xmlns:a16="http://schemas.microsoft.com/office/drawing/2014/main" id="{E4B5ED3E-0E61-47F3-8AFE-C9EC0E9A2721}"/>
               </a:ext>
             </a:extLst>
           </p:cNvPr>
@@ -7753,7 +7753,7 @@
         <p:spPr>
           <a:xfrm xmlns:a="http://schemas.openxmlformats.org/drawingml/2006/main">
             <a:off x="685800" y="2076450"/>
-            <a:ext cx="952500" cy="342900"/>
+            <a:ext cx="1333500" cy="342900"/>
           </a:xfrm>
           <a:prstGeom xmlns:a="http://schemas.openxmlformats.org/drawingml/2006/main" prst="rect">
             <a:avLst/>
@@ -7776,7 +7776,7 @@
               </a:defRPr>
             </a:pPr>
             <a:r>
-              <a:t>위험</a:t>
+              <a:t>확인 항목</a:t>
             </a:r>
           </a:p>
         </p:txBody>
@@ -7786,7 +7786,7 @@
           <p:cNvPr id="6" name="">
             <a:extLst xmlns:a="http://schemas.openxmlformats.org/drawingml/2006/main">
               <a:ext uri="{FF2B5EF4-FFF2-40B4-BE49-F238E27FC236}">
-                <a16:creationId xmlns:a16="http://schemas.microsoft.com/office/drawing/2014/main" id="{FE1C2C33-DF87-4812-9323-03F61BE22D22}"/>
+                <a16:creationId xmlns:a16="http://schemas.microsoft.com/office/drawing/2014/main" id="{997275DB-FC12-4A36-908F-B17C25B3AC13}"/>
               </a:ext>
             </a:extLst>
           </p:cNvPr>
@@ -7834,7 +7834,7 @@
           <p:cNvPr id="7" name="">
             <a:extLst xmlns:a="http://schemas.openxmlformats.org/drawingml/2006/main">
               <a:ext uri="{FF2B5EF4-FFF2-40B4-BE49-F238E27FC236}">
-                <a16:creationId xmlns:a16="http://schemas.microsoft.com/office/drawing/2014/main" id="{B795BC92-8507-4BB6-85A9-D962659F60D2}"/>
+                <a16:creationId xmlns:a16="http://schemas.microsoft.com/office/drawing/2014/main" id="{7936BF9A-2C09-491B-A934-19433B46319B}"/>
               </a:ext>
             </a:extLst>
           </p:cNvPr>
@@ -7863,7 +7863,7 @@
           <p:cNvPr id="8" name="">
             <a:extLst xmlns:a="http://schemas.openxmlformats.org/drawingml/2006/main">
               <a:ext uri="{FF2B5EF4-FFF2-40B4-BE49-F238E27FC236}">
-                <a16:creationId xmlns:a16="http://schemas.microsoft.com/office/drawing/2014/main" id="{039D1A28-90E1-48B1-9060-F35D51C79761}"/>
+                <a16:creationId xmlns:a16="http://schemas.microsoft.com/office/drawing/2014/main" id="{309A266B-CCD9-4ABE-B8C9-F991D9A0EF28}"/>
               </a:ext>
             </a:extLst>
           </p:cNvPr>
@@ -7908,7 +7908,7 @@
           <p:cNvPr id="9" name="">
             <a:extLst xmlns:a="http://schemas.openxmlformats.org/drawingml/2006/main">
               <a:ext uri="{FF2B5EF4-FFF2-40B4-BE49-F238E27FC236}">
-                <a16:creationId xmlns:a16="http://schemas.microsoft.com/office/drawing/2014/main" id="{7D790BDE-E882-4320-B681-78C3733FB449}"/>
+                <a16:creationId xmlns:a16="http://schemas.microsoft.com/office/drawing/2014/main" id="{C7D82E5F-F3A3-4EF7-AB15-52EF6B06E32B}"/>
               </a:ext>
             </a:extLst>
           </p:cNvPr>
@@ -7956,7 +7956,7 @@
           <p:cNvPr id="10" name="">
             <a:extLst xmlns:a="http://schemas.openxmlformats.org/drawingml/2006/main">
               <a:ext uri="{FF2B5EF4-FFF2-40B4-BE49-F238E27FC236}">
-                <a16:creationId xmlns:a16="http://schemas.microsoft.com/office/drawing/2014/main" id="{1F6AE929-8255-4B78-A024-7BD3D4525C3D}"/>
+                <a16:creationId xmlns:a16="http://schemas.microsoft.com/office/drawing/2014/main" id="{A35A9AC7-F1EA-4DB1-AF56-E20935B10AC8}"/>
               </a:ext>
             </a:extLst>
           </p:cNvPr>
@@ -7985,7 +7985,7 @@
           <p:cNvPr id="11" name="">
             <a:extLst xmlns:a="http://schemas.openxmlformats.org/drawingml/2006/main">
               <a:ext uri="{FF2B5EF4-FFF2-40B4-BE49-F238E27FC236}">
-                <a16:creationId xmlns:a16="http://schemas.microsoft.com/office/drawing/2014/main" id="{D255CBCA-5812-4CEC-849F-7D2A02ED0753}"/>
+                <a16:creationId xmlns:a16="http://schemas.microsoft.com/office/drawing/2014/main" id="{1E2C37A2-7A58-482F-BD14-70CBEF493AE5}"/>
               </a:ext>
             </a:extLst>
           </p:cNvPr>
@@ -8020,7 +8020,7 @@
               </a:defRPr>
             </a:pPr>
             <a:r>
-              <a:t>승인 조건</a:t>
+              <a:t>적용 원칙</a:t>
             </a:r>
           </a:p>
         </p:txBody>
@@ -8030,7 +8030,7 @@
           <p:cNvPr id="12" name="">
             <a:extLst xmlns:a="http://schemas.openxmlformats.org/drawingml/2006/main">
               <a:ext uri="{FF2B5EF4-FFF2-40B4-BE49-F238E27FC236}">
-                <a16:creationId xmlns:a16="http://schemas.microsoft.com/office/drawing/2014/main" id="{BDD4C5C6-6A57-4BC9-A248-748C87C1BB8C}"/>
+                <a16:creationId xmlns:a16="http://schemas.microsoft.com/office/drawing/2014/main" id="{BBBC7345-AFB0-4EC3-ACFB-CF2E643D8354}"/>
               </a:ext>
             </a:extLst>
           </p:cNvPr>
@@ -8065,10 +8065,10 @@
               </a:defRPr>
             </a:pPr>
             <a:r>
-              <a:t>Activepieces 서면 답변
-법무 승인
-릴리스별 차이 검토
-설치 미디어에 고지 포함</a:t>
+              <a:t>정보는 보고서에 유지
+공개 결정 시 재검토
+자체 구현은 계속 진행
+백로그 게이트로 사용하지 않음</a:t>
             </a:r>
           </a:p>
         </p:txBody>
@@ -8078,7 +8078,7 @@
           <p:cNvPr id="13" name="">
             <a:extLst xmlns:a="http://schemas.openxmlformats.org/drawingml/2006/main">
               <a:ext uri="{FF2B5EF4-FFF2-40B4-BE49-F238E27FC236}">
-                <a16:creationId xmlns:a16="http://schemas.microsoft.com/office/drawing/2014/main" id="{AF31AF35-2E8F-475E-9318-2AE52B6EE3D3}"/>
+                <a16:creationId xmlns:a16="http://schemas.microsoft.com/office/drawing/2014/main" id="{0EACD722-0D4C-414C-BE50-0C617598E48A}"/>
               </a:ext>
             </a:extLst>
           </p:cNvPr>
@@ -8107,7 +8107,7 @@
           <p:cNvPr id="14" name="">
             <a:extLst xmlns:a="http://schemas.openxmlformats.org/drawingml/2006/main">
               <a:ext uri="{FF2B5EF4-FFF2-40B4-BE49-F238E27FC236}">
-                <a16:creationId xmlns:a16="http://schemas.microsoft.com/office/drawing/2014/main" id="{C455CDE3-C9AD-4DC3-83C9-A8855D81C2F8}"/>
+                <a16:creationId xmlns:a16="http://schemas.microsoft.com/office/drawing/2014/main" id="{1409B91D-EE98-4D8B-96FF-8F140E199326}"/>
               </a:ext>
             </a:extLst>
           </p:cNvPr>
@@ -8142,7 +8142,7 @@
               </a:defRPr>
             </a:pPr>
             <a:r>
-              <a:t>결정  |  G2 고객 파일럿 전에는 공식 결합 이미지 또는 수정 이미지를 ABLESTACK 설치 미디어에 포함하지 않는다.</a:t>
+              <a:t>결정  |  라이선스·공개 관련 확인은 제품 책임자의 공개 판단을 지원하며 기능 구현을 차단하지 않는다.</a:t>
             </a:r>
           </a:p>
         </p:txBody>
@@ -8150,7 +8150,7 @@
     </p:spTree>
     <p:extLst>
       <p:ext uri="{BB962C8B-B14F-4D97-AF65-F5344CB8AC3E}">
-        <p14:creationId xmlns:p14="http://schemas.microsoft.com/office/powerpoint/2010/main" val="1518659542"/>
+        <p14:creationId xmlns:p14="http://schemas.microsoft.com/office/powerpoint/2010/main" val="1314184532"/>
       </p:ext>
     </p:extLst>
   </p:cSld>
@@ -8174,7 +8174,7 @@
           <p:cNvPr id="23" name="">
             <a:extLst xmlns:a="http://schemas.openxmlformats.org/drawingml/2006/main">
               <a:ext uri="{FF2B5EF4-FFF2-40B4-BE49-F238E27FC236}">
-                <a16:creationId xmlns:a16="http://schemas.microsoft.com/office/drawing/2014/main" id="{44C1B5B7-5290-4435-9A2E-26A13581DF87}"/>
+                <a16:creationId xmlns:a16="http://schemas.microsoft.com/office/drawing/2014/main" id="{8F776455-FC13-451C-B4CD-A5FBD1A6ACE2}"/>
               </a:ext>
             </a:extLst>
           </p:cNvPr>
@@ -8219,7 +8219,7 @@
           <p:cNvPr id="2" name="">
             <a:extLst xmlns:a="http://schemas.openxmlformats.org/drawingml/2006/main">
               <a:ext uri="{FF2B5EF4-FFF2-40B4-BE49-F238E27FC236}">
-                <a16:creationId xmlns:a16="http://schemas.microsoft.com/office/drawing/2014/main" id="{B94B76A0-8833-4850-B09B-FF9A8F5C5AF1}"/>
+                <a16:creationId xmlns:a16="http://schemas.microsoft.com/office/drawing/2014/main" id="{D37E9953-46AD-4C7D-93EC-2E35741B793E}"/>
               </a:ext>
             </a:extLst>
           </p:cNvPr>
@@ -8264,7 +8264,7 @@
           <p:cNvPr id="3" name="">
             <a:extLst xmlns:a="http://schemas.openxmlformats.org/drawingml/2006/main">
               <a:ext uri="{FF2B5EF4-FFF2-40B4-BE49-F238E27FC236}">
-                <a16:creationId xmlns:a16="http://schemas.microsoft.com/office/drawing/2014/main" id="{670036A3-D0F8-4290-9E2A-059EFF2BF40C}"/>
+                <a16:creationId xmlns:a16="http://schemas.microsoft.com/office/drawing/2014/main" id="{FDB47D9E-796E-498A-883B-CBCF969B5DE1}"/>
               </a:ext>
             </a:extLst>
           </p:cNvPr>
@@ -8299,7 +8299,7 @@
               </a:defRPr>
             </a:pPr>
             <a:r>
-              <a:t>이슈 #11은 설계 결정을 닫고, 출시 게이트는 후속 이슈로 추적한다.</a:t>
+              <a:t>Community 실행 기반 위에 TechFlow 제품 기능을 단계적으로 구현한다.</a:t>
             </a:r>
           </a:p>
         </p:txBody>
@@ -8309,7 +8309,7 @@
           <p:cNvPr id="4" name="">
             <a:extLst xmlns:a="http://schemas.openxmlformats.org/drawingml/2006/main">
               <a:ext uri="{FF2B5EF4-FFF2-40B4-BE49-F238E27FC236}">
-                <a16:creationId xmlns:a16="http://schemas.microsoft.com/office/drawing/2014/main" id="{FA6A1E9B-B5B5-4386-9D11-4282524050A4}"/>
+                <a16:creationId xmlns:a16="http://schemas.microsoft.com/office/drawing/2014/main" id="{9E15FCFD-C208-4E9F-AC87-FF599FC7910E}"/>
               </a:ext>
             </a:extLst>
           </p:cNvPr>
@@ -8336,7 +8336,7 @@
           <p:cNvPr id="5" name="">
             <a:extLst xmlns:a="http://schemas.openxmlformats.org/drawingml/2006/main">
               <a:ext uri="{FF2B5EF4-FFF2-40B4-BE49-F238E27FC236}">
-                <a16:creationId xmlns:a16="http://schemas.microsoft.com/office/drawing/2014/main" id="{724421DA-4DF7-4DAC-A824-EAD653D9F63F}"/>
+                <a16:creationId xmlns:a16="http://schemas.microsoft.com/office/drawing/2014/main" id="{782C98E5-2E0D-4E60-BC95-44841FE766A1}"/>
               </a:ext>
             </a:extLst>
           </p:cNvPr>
@@ -8365,7 +8365,7 @@
           <p:cNvPr id="6" name="">
             <a:extLst xmlns:a="http://schemas.openxmlformats.org/drawingml/2006/main">
               <a:ext uri="{FF2B5EF4-FFF2-40B4-BE49-F238E27FC236}">
-                <a16:creationId xmlns:a16="http://schemas.microsoft.com/office/drawing/2014/main" id="{51DCB434-1284-4182-AFF8-7B1BF31B22E4}"/>
+                <a16:creationId xmlns:a16="http://schemas.microsoft.com/office/drawing/2014/main" id="{91776299-3531-463A-BF89-96F88C8510FC}"/>
               </a:ext>
             </a:extLst>
           </p:cNvPr>
@@ -8410,7 +8410,7 @@
           <p:cNvPr id="7" name="">
             <a:extLst xmlns:a="http://schemas.openxmlformats.org/drawingml/2006/main">
               <a:ext uri="{FF2B5EF4-FFF2-40B4-BE49-F238E27FC236}">
-                <a16:creationId xmlns:a16="http://schemas.microsoft.com/office/drawing/2014/main" id="{5D7DF279-D407-4058-BEE1-7B5089D8E194}"/>
+                <a16:creationId xmlns:a16="http://schemas.microsoft.com/office/drawing/2014/main" id="{F32EEF62-8034-4A55-AE5D-21ADFBA87563}"/>
               </a:ext>
             </a:extLst>
           </p:cNvPr>
@@ -8439,7 +8439,7 @@
           <p:cNvPr id="8" name="">
             <a:extLst xmlns:a="http://schemas.openxmlformats.org/drawingml/2006/main">
               <a:ext uri="{FF2B5EF4-FFF2-40B4-BE49-F238E27FC236}">
-                <a16:creationId xmlns:a16="http://schemas.microsoft.com/office/drawing/2014/main" id="{460D0CEA-F31A-4797-9D98-1FDAA8066BC1}"/>
+                <a16:creationId xmlns:a16="http://schemas.microsoft.com/office/drawing/2014/main" id="{B796D5B9-066A-4407-A86A-7AEE3E4F8835}"/>
               </a:ext>
             </a:extLst>
           </p:cNvPr>
@@ -8484,7 +8484,7 @@
           <p:cNvPr id="9" name="">
             <a:extLst xmlns:a="http://schemas.openxmlformats.org/drawingml/2006/main">
               <a:ext uri="{FF2B5EF4-FFF2-40B4-BE49-F238E27FC236}">
-                <a16:creationId xmlns:a16="http://schemas.microsoft.com/office/drawing/2014/main" id="{F6C020BC-D827-4DFF-8816-378AB87C8AA2}"/>
+                <a16:creationId xmlns:a16="http://schemas.microsoft.com/office/drawing/2014/main" id="{E9AC0F53-882B-471E-8FE6-58F9DE56EF71}"/>
               </a:ext>
             </a:extLst>
           </p:cNvPr>
@@ -8513,7 +8513,7 @@
           <p:cNvPr id="10" name="">
             <a:extLst xmlns:a="http://schemas.openxmlformats.org/drawingml/2006/main">
               <a:ext uri="{FF2B5EF4-FFF2-40B4-BE49-F238E27FC236}">
-                <a16:creationId xmlns:a16="http://schemas.microsoft.com/office/drawing/2014/main" id="{0DA8253C-D344-470A-93D9-945E81AEEB1C}"/>
+                <a16:creationId xmlns:a16="http://schemas.microsoft.com/office/drawing/2014/main" id="{7ADCDC30-06F7-4E6B-9432-EB3E08B020AF}"/>
               </a:ext>
             </a:extLst>
           </p:cNvPr>
@@ -8558,7 +8558,7 @@
           <p:cNvPr id="11" name="">
             <a:extLst xmlns:a="http://schemas.openxmlformats.org/drawingml/2006/main">
               <a:ext uri="{FF2B5EF4-FFF2-40B4-BE49-F238E27FC236}">
-                <a16:creationId xmlns:a16="http://schemas.microsoft.com/office/drawing/2014/main" id="{7340F13D-D370-488E-B105-43CC627E24D7}"/>
+                <a16:creationId xmlns:a16="http://schemas.microsoft.com/office/drawing/2014/main" id="{2F8ACE41-28AA-49B1-AD35-F128E2C9287F}"/>
               </a:ext>
             </a:extLst>
           </p:cNvPr>
@@ -8587,7 +8587,7 @@
           <p:cNvPr id="12" name="">
             <a:extLst xmlns:a="http://schemas.openxmlformats.org/drawingml/2006/main">
               <a:ext uri="{FF2B5EF4-FFF2-40B4-BE49-F238E27FC236}">
-                <a16:creationId xmlns:a16="http://schemas.microsoft.com/office/drawing/2014/main" id="{BF8A98A9-B62B-4069-8C77-697C410C2AF8}"/>
+                <a16:creationId xmlns:a16="http://schemas.microsoft.com/office/drawing/2014/main" id="{763992AC-E2ED-4201-8D57-FC39373396CA}"/>
               </a:ext>
             </a:extLst>
           </p:cNvPr>
@@ -8632,7 +8632,7 @@
           <p:cNvPr id="13" name="">
             <a:extLst xmlns:a="http://schemas.openxmlformats.org/drawingml/2006/main">
               <a:ext uri="{FF2B5EF4-FFF2-40B4-BE49-F238E27FC236}">
-                <a16:creationId xmlns:a16="http://schemas.microsoft.com/office/drawing/2014/main" id="{65E6DE69-5CB5-4EBE-8B87-C9B6B32EA7A7}"/>
+                <a16:creationId xmlns:a16="http://schemas.microsoft.com/office/drawing/2014/main" id="{BBEEA6C8-4F82-4990-8F97-E985BBF83734}"/>
               </a:ext>
             </a:extLst>
           </p:cNvPr>
@@ -8667,7 +8667,7 @@
               </a:defRPr>
             </a:pPr>
             <a:r>
-              <a:t>PoC 배포</a:t>
+              <a:t>CE 실행 환경</a:t>
             </a:r>
           </a:p>
         </p:txBody>
@@ -8677,7 +8677,7 @@
           <p:cNvPr id="14" name="">
             <a:extLst xmlns:a="http://schemas.openxmlformats.org/drawingml/2006/main">
               <a:ext uri="{FF2B5EF4-FFF2-40B4-BE49-F238E27FC236}">
-                <a16:creationId xmlns:a16="http://schemas.microsoft.com/office/drawing/2014/main" id="{C06E7B6C-94A5-46A1-819F-7DF01D2891D4}"/>
+                <a16:creationId xmlns:a16="http://schemas.microsoft.com/office/drawing/2014/main" id="{17F4CB69-C727-4F50-ACAF-DCF10D09DA40}"/>
               </a:ext>
             </a:extLst>
           </p:cNvPr>
@@ -8712,8 +8712,8 @@
               </a:defRPr>
             </a:pPr>
             <a:r>
-              <a:t>CE 기능 제한
-운영자 UI 격리</a:t>
+              <a:t>Builder · Webhook
+Queue · Worker</a:t>
             </a:r>
           </a:p>
         </p:txBody>
@@ -8723,7 +8723,7 @@
           <p:cNvPr id="15" name="">
             <a:extLst xmlns:a="http://schemas.openxmlformats.org/drawingml/2006/main">
               <a:ext uri="{FF2B5EF4-FFF2-40B4-BE49-F238E27FC236}">
-                <a16:creationId xmlns:a16="http://schemas.microsoft.com/office/drawing/2014/main" id="{31A84A01-138F-48B6-80A9-DC41AB6C8F60}"/>
+                <a16:creationId xmlns:a16="http://schemas.microsoft.com/office/drawing/2014/main" id="{777BB84A-CE40-4B87-B6BD-CF6BED6161AB}"/>
               </a:ext>
             </a:extLst>
           </p:cNvPr>
@@ -8758,7 +8758,7 @@
               </a:defRPr>
             </a:pPr>
             <a:r>
-              <a:t>SBOM 자동화</a:t>
+              <a:t>TechFlow Core</a:t>
             </a:r>
           </a:p>
         </p:txBody>
@@ -8768,7 +8768,7 @@
           <p:cNvPr id="16" name="">
             <a:extLst xmlns:a="http://schemas.openxmlformats.org/drawingml/2006/main">
               <a:ext uri="{FF2B5EF4-FFF2-40B4-BE49-F238E27FC236}">
-                <a16:creationId xmlns:a16="http://schemas.microsoft.com/office/drawing/2014/main" id="{B318AF7C-0287-4A9B-BF13-73EBD9418769}"/>
+                <a16:creationId xmlns:a16="http://schemas.microsoft.com/office/drawing/2014/main" id="{AB34D941-FB4D-431A-B759-3777E25F9FE9}"/>
               </a:ext>
             </a:extLst>
           </p:cNvPr>
@@ -8803,8 +8803,8 @@
               </a:defRPr>
             </a:pPr>
             <a:r>
-              <a:t>digest·NOTICE
-릴리스 증적</a:t>
+              <a:t>정책 · 승인 · 감사
+제품 API</a:t>
             </a:r>
           </a:p>
         </p:txBody>
@@ -8814,7 +8814,7 @@
           <p:cNvPr id="17" name="">
             <a:extLst xmlns:a="http://schemas.openxmlformats.org/drawingml/2006/main">
               <a:ext uri="{FF2B5EF4-FFF2-40B4-BE49-F238E27FC236}">
-                <a16:creationId xmlns:a16="http://schemas.microsoft.com/office/drawing/2014/main" id="{348F394F-5BE4-44D4-8CF5-5579DE92D8FC}"/>
+                <a16:creationId xmlns:a16="http://schemas.microsoft.com/office/drawing/2014/main" id="{07C49A0F-4A98-4689-808E-E169CC4010EC}"/>
               </a:ext>
             </a:extLst>
           </p:cNvPr>
@@ -8849,7 +8849,7 @@
               </a:defRPr>
             </a:pPr>
             <a:r>
-              <a:t>벤더 확인</a:t>
+              <a:t>제품 UI·통합</a:t>
             </a:r>
           </a:p>
         </p:txBody>
@@ -8859,7 +8859,7 @@
           <p:cNvPr id="18" name="">
             <a:extLst xmlns:a="http://schemas.openxmlformats.org/drawingml/2006/main">
               <a:ext uri="{FF2B5EF4-FFF2-40B4-BE49-F238E27FC236}">
-                <a16:creationId xmlns:a16="http://schemas.microsoft.com/office/drawing/2014/main" id="{B42B1C3A-3AA8-4752-8E56-D6B26430054B}"/>
+                <a16:creationId xmlns:a16="http://schemas.microsoft.com/office/drawing/2014/main" id="{A748E3CC-DE56-424F-ABE0-8CFD03934040}"/>
               </a:ext>
             </a:extLst>
           </p:cNvPr>
@@ -8894,8 +8894,8 @@
               </a:defRPr>
             </a:pPr>
             <a:r>
-              <a:t>재배포·UI·OEM
-오프라인 조건</a:t>
+              <a:t>Portal · Builder
+IAM · Secret</a:t>
             </a:r>
           </a:p>
         </p:txBody>
@@ -8905,7 +8905,7 @@
           <p:cNvPr id="19" name="">
             <a:extLst xmlns:a="http://schemas.openxmlformats.org/drawingml/2006/main">
               <a:ext uri="{FF2B5EF4-FFF2-40B4-BE49-F238E27FC236}">
-                <a16:creationId xmlns:a16="http://schemas.microsoft.com/office/drawing/2014/main" id="{247733E7-79F0-42C8-907D-983A7BE24B63}"/>
+                <a16:creationId xmlns:a16="http://schemas.microsoft.com/office/drawing/2014/main" id="{401BDBAE-D211-487C-9FB5-868A89ED17FA}"/>
               </a:ext>
             </a:extLst>
           </p:cNvPr>
@@ -8940,7 +8940,7 @@
               </a:defRPr>
             </a:pPr>
             <a:r>
-              <a:t>계약·법무</a:t>
+              <a:t>운영 고도화</a:t>
             </a:r>
           </a:p>
         </p:txBody>
@@ -8950,7 +8950,7 @@
           <p:cNvPr id="20" name="">
             <a:extLst xmlns:a="http://schemas.openxmlformats.org/drawingml/2006/main">
               <a:ext uri="{FF2B5EF4-FFF2-40B4-BE49-F238E27FC236}">
-                <a16:creationId xmlns:a16="http://schemas.microsoft.com/office/drawing/2014/main" id="{8DBF31A4-9E8D-48D7-8431-1C56760670C6}"/>
+                <a16:creationId xmlns:a16="http://schemas.microsoft.com/office/drawing/2014/main" id="{9E9297C2-4ABB-491B-A666-17E188192C97}"/>
               </a:ext>
             </a:extLst>
           </p:cNvPr>
@@ -8970,7 +8970,7 @@
         </p:spPr>
         <p:txBody>
           <a:bodyPr xmlns:a="http://schemas.openxmlformats.org/drawingml/2006/main" lIns="0" tIns="0" rIns="0" bIns="0" anchor="t">
-            <a:normAutofit fontScale="100000"/>
+            <a:normAutofit fontScale="98180"/>
           </a:bodyPr>
           <a:lstStyle xmlns:a="http://schemas.openxmlformats.org/drawingml/2006/main"/>
           <a:p xmlns:a="http://schemas.openxmlformats.org/drawingml/2006/main">
@@ -8985,8 +8985,8 @@
               </a:defRPr>
             </a:pPr>
             <a:r>
-              <a:t>파일럿·GA
-승인 게이트</a:t>
+              <a:t>GitOps · Worker 격리
+Analytics · AIOps</a:t>
             </a:r>
           </a:p>
         </p:txBody>
@@ -8996,7 +8996,7 @@
           <p:cNvPr id="21" name="">
             <a:extLst xmlns:a="http://schemas.openxmlformats.org/drawingml/2006/main">
               <a:ext uri="{FF2B5EF4-FFF2-40B4-BE49-F238E27FC236}">
-                <a16:creationId xmlns:a16="http://schemas.microsoft.com/office/drawing/2014/main" id="{380E574B-FC68-4365-A31D-6DA7FC4654CD}"/>
+                <a16:creationId xmlns:a16="http://schemas.microsoft.com/office/drawing/2014/main" id="{70F18BB9-616B-4AD5-9A2B-2E0630BEF6A6}"/>
               </a:ext>
             </a:extLst>
           </p:cNvPr>
@@ -9025,7 +9025,7 @@
           <p:cNvPr id="22" name="">
             <a:extLst xmlns:a="http://schemas.openxmlformats.org/drawingml/2006/main">
               <a:ext uri="{FF2B5EF4-FFF2-40B4-BE49-F238E27FC236}">
-                <a16:creationId xmlns:a16="http://schemas.microsoft.com/office/drawing/2014/main" id="{27DC6042-CA44-45EE-985E-A7A5DB17695A}"/>
+                <a16:creationId xmlns:a16="http://schemas.microsoft.com/office/drawing/2014/main" id="{4FC59DDF-1419-471F-8C30-A314E89C5C42}"/>
               </a:ext>
             </a:extLst>
           </p:cNvPr>
@@ -9060,7 +9060,7 @@
               </a:defRPr>
             </a:pPr>
             <a:r>
-              <a:t>즉시 실행: Activepieces CE 테스트 환경 구축 이슈로 이동 · 고객 배포 기능은 별도 승인 없이 범위를 넓히지 않음</a:t>
+              <a:t>즉시 실행: Activepieces CE 테스트 환경 구축 · 필요한 상위 기능은 제품 요구사항과 우선순위에 따라 자체 구현</a:t>
             </a:r>
           </a:p>
         </p:txBody>
@@ -9068,7 +9068,7 @@
     </p:spTree>
     <p:extLst>
       <p:ext uri="{BB962C8B-B14F-4D97-AF65-F5344CB8AC3E}">
-        <p14:creationId xmlns:p14="http://schemas.microsoft.com/office/powerpoint/2010/main" val="2143923199"/>
+        <p14:creationId xmlns:p14="http://schemas.microsoft.com/office/powerpoint/2010/main" val="1071293343"/>
       </p:ext>
     </p:extLst>
   </p:cSld>
